--- a/ML-Assisted-Portfolio-Optimization-Under-Realistic-Trading-Constraints.pptx
+++ b/ML-Assisted-Portfolio-Optimization-Under-Realistic-Trading-Constraints.pptx
@@ -5,21 +5,24 @@
     <p:sldMasterId id="2147483648" r:id="rId1"/>
   </p:sldMasterIdLst>
   <p:notesMasterIdLst>
-    <p:notesMasterId r:id="rId10"/>
+    <p:notesMasterId r:id="rId9"/>
   </p:notesMasterIdLst>
   <p:sldIdLst>
     <p:sldId id="256" r:id="rId2"/>
     <p:sldId id="257" r:id="rId3"/>
     <p:sldId id="258" r:id="rId4"/>
     <p:sldId id="263" r:id="rId5"/>
-    <p:sldId id="259" r:id="rId6"/>
-    <p:sldId id="260" r:id="rId7"/>
-    <p:sldId id="261" r:id="rId8"/>
-    <p:sldId id="262" r:id="rId9"/>
+    <p:sldId id="260" r:id="rId6"/>
+    <p:sldId id="261" r:id="rId7"/>
+    <p:sldId id="262" r:id="rId8"/>
   </p:sldIdLst>
   <p:sldSz cx="12192000" cy="6858000"/>
   <p:notesSz cx="6858000" cy="12192000"/>
   <p:embeddedFontLst>
+    <p:embeddedFont>
+      <p:font typeface="Cambria Math" panose="02040503050406030204" pitchFamily="18" charset="0"/>
+      <p:regular r:id="rId10"/>
+    </p:embeddedFont>
     <p:embeddedFont>
       <p:font typeface="Consolas" panose="020B0609020204030204" pitchFamily="49" charset="0"/>
       <p:regular r:id="rId11"/>
@@ -675,90 +678,6 @@
             <a:fld id="{F7021451-1387-4CA6-816F-3879F97B5CBC}" type="slidenum">
               <a:rPr lang="en-US"/>
               <a:t>6</a:t>
-            </a:fld>
-            <a:endParaRPr lang="en-US"/>
-          </a:p>
-        </p:txBody>
-      </p:sp>
-    </p:spTree>
-    <p:extLst>
-      <p:ext uri="{BB962C8B-B14F-4D97-AF65-F5344CB8AC3E}">
-        <p14:creationId xmlns:p14="http://schemas.microsoft.com/office/powerpoint/2010/main" val="1024086991"/>
-      </p:ext>
-    </p:extLst>
-  </p:cSld>
-  <p:clrMapOvr>
-    <a:masterClrMapping/>
-  </p:clrMapOvr>
-</p:notes>
-</file>
-
-<file path=ppt/notesSlides/notesSlide6.xml><?xml version="1.0" encoding="utf-8"?>
-<p:notes xmlns:a="http://schemas.openxmlformats.org/drawingml/2006/main" xmlns:r="http://schemas.openxmlformats.org/officeDocument/2006/relationships" xmlns:p="http://schemas.openxmlformats.org/presentationml/2006/main">
-  <p:cSld>
-    <p:spTree>
-      <p:nvGrpSpPr>
-        <p:cNvPr id="1" name=""/>
-        <p:cNvGrpSpPr/>
-        <p:nvPr/>
-      </p:nvGrpSpPr>
-      <p:grpSpPr>
-        <a:xfrm>
-          <a:off x="0" y="0"/>
-          <a:ext cx="0" cy="0"/>
-          <a:chOff x="0" y="0"/>
-          <a:chExt cx="0" cy="0"/>
-        </a:xfrm>
-      </p:grpSpPr>
-      <p:sp>
-        <p:nvSpPr>
-          <p:cNvPr id="2" name="Slide Image Placeholder 1"/>
-          <p:cNvSpPr>
-            <a:spLocks noGrp="1" noRot="1" noChangeAspect="1"/>
-          </p:cNvSpPr>
-          <p:nvPr>
-            <p:ph type="sldImg"/>
-          </p:nvPr>
-        </p:nvSpPr>
-        <p:spPr/>
-      </p:sp>
-      <p:sp>
-        <p:nvSpPr>
-          <p:cNvPr id="3" name="Notes Placeholder 2"/>
-          <p:cNvSpPr>
-            <a:spLocks noGrp="1"/>
-          </p:cNvSpPr>
-          <p:nvPr>
-            <p:ph type="body" idx="1"/>
-          </p:nvPr>
-        </p:nvSpPr>
-        <p:spPr/>
-        <p:txBody>
-          <a:bodyPr/>
-          <a:lstStyle/>
-          <a:p>
-            <a:endParaRPr lang="en-US" dirty="0"/>
-          </a:p>
-        </p:txBody>
-      </p:sp>
-      <p:sp>
-        <p:nvSpPr>
-          <p:cNvPr id="4" name="Slide Number Placeholder 3"/>
-          <p:cNvSpPr>
-            <a:spLocks noGrp="1"/>
-          </p:cNvSpPr>
-          <p:nvPr>
-            <p:ph type="sldNum" sz="quarter" idx="10"/>
-          </p:nvPr>
-        </p:nvSpPr>
-        <p:spPr/>
-        <p:txBody>
-          <a:bodyPr/>
-          <a:lstStyle/>
-          <a:p>
-            <a:fld id="{F7021451-1387-4CA6-816F-3879F97B5CBC}" type="slidenum">
-              <a:rPr lang="en-US"/>
-              <a:t>7</a:t>
             </a:fld>
             <a:endParaRPr lang="en-US"/>
           </a:p>
@@ -4354,7 +4273,7 @@
 
 <file path=ppt/slides/slide5.xml><?xml version="1.0" encoding="utf-8"?>
 <p:sld xmlns:a="http://schemas.openxmlformats.org/drawingml/2006/main" xmlns:r="http://schemas.openxmlformats.org/officeDocument/2006/relationships" xmlns:p="http://schemas.openxmlformats.org/presentationml/2006/main">
-  <p:cSld name="Slide 4">
+  <p:cSld name="Slide 5">
     <p:spTree>
       <p:nvGrpSpPr>
         <p:cNvPr id="1" name=""/>
@@ -4377,12 +4296,12 @@
         </p:nvSpPr>
         <p:spPr>
           <a:xfrm>
-            <a:off x="661475" y="471388"/>
-            <a:ext cx="617820" cy="125710"/>
+            <a:off x="661475" y="575171"/>
+            <a:ext cx="1772895" cy="208062"/>
           </a:xfrm>
           <a:prstGeom prst="roundRect">
             <a:avLst>
-              <a:gd name="adj" fmla="val 22103"/>
+              <a:gd name="adj" fmla="val 22118"/>
             </a:avLst>
           </a:prstGeom>
           <a:solidFill>
@@ -4399,8 +4318,8 @@
         </p:nvSpPr>
         <p:spPr>
           <a:xfrm>
-            <a:off x="711083" y="496193"/>
-            <a:ext cx="1128188" cy="76101"/>
+            <a:off x="743626" y="616248"/>
+            <a:ext cx="2218178" cy="125909"/>
           </a:xfrm>
           <a:prstGeom prst="rect">
             <a:avLst/>
@@ -4419,7 +4338,7 @@
               <a:buNone/>
             </a:pPr>
             <a:r>
-              <a:rPr lang="en-US" sz="500" dirty="0">
+              <a:rPr lang="en-US" sz="850" dirty="0">
                 <a:solidFill>
                   <a:srgbClr val="272525"/>
                 </a:solidFill>
@@ -4427,9 +4346,9 @@
                 <a:ea typeface="Inter" pitchFamily="34" charset="-122"/>
                 <a:cs typeface="Inter" pitchFamily="34" charset="-120"/>
               </a:rPr>
-              <a:t>METHODOLOGY</a:t>
-            </a:r>
-            <a:endParaRPr lang="en-US" sz="500" dirty="0"/>
+              <a:t>OPTIMIZATION FORMULATION</a:t>
+            </a:r>
+            <a:endParaRPr lang="en-US" sz="850" dirty="0"/>
           </a:p>
         </p:txBody>
       </p:sp>
@@ -4441,8 +4360,8 @@
         </p:nvSpPr>
         <p:spPr>
           <a:xfrm>
-            <a:off x="661475" y="613569"/>
-            <a:ext cx="10868745" cy="271363"/>
+            <a:off x="661475" y="828576"/>
+            <a:ext cx="10868745" cy="449461"/>
           </a:xfrm>
           <a:prstGeom prst="rect">
             <a:avLst/>
@@ -4461,7 +4380,7 @@
               <a:buNone/>
             </a:pPr>
             <a:r>
-              <a:rPr lang="en-US" sz="1700" b="1" dirty="0">
+              <a:rPr lang="en-US" sz="2800" b="1" dirty="0">
                 <a:solidFill>
                   <a:srgbClr val="000000"/>
                 </a:solidFill>
@@ -4469,9 +4388,9 @@
                 <a:ea typeface="Petrona Bold" pitchFamily="34" charset="-122"/>
                 <a:cs typeface="Petrona Bold" pitchFamily="34" charset="-120"/>
               </a:rPr>
-              <a:t>From Simple to Realistic</a:t>
-            </a:r>
-            <a:endParaRPr lang="en-US" sz="1700" dirty="0"/>
+              <a:t>From Idealized to Realistic Portfolio Optimization</a:t>
+            </a:r>
+            <a:endParaRPr lang="en-US" sz="2800" dirty="0"/>
           </a:p>
         </p:txBody>
       </p:sp>
@@ -4483,8 +4402,8 @@
         </p:nvSpPr>
         <p:spPr>
           <a:xfrm>
-            <a:off x="661475" y="946944"/>
-            <a:ext cx="11478330" cy="99120"/>
+            <a:off x="661475" y="1323380"/>
+            <a:ext cx="10868745" cy="224730"/>
           </a:xfrm>
           <a:prstGeom prst="rect">
             <a:avLst/>
@@ -4498,12 +4417,174 @@
           <a:p>
             <a:pPr marL="0" indent="0" algn="l">
               <a:lnSpc>
-                <a:spcPct val="100000"/>
+                <a:spcPct val="104000"/>
               </a:lnSpc>
               <a:buNone/>
             </a:pPr>
             <a:r>
-              <a:rPr lang="en-US" sz="650" dirty="0">
+              <a:rPr lang="en-US" sz="1400" b="1" dirty="0">
+                <a:solidFill>
+                  <a:srgbClr val="000000"/>
+                </a:solidFill>
+                <a:latin typeface="Petrona Bold" pitchFamily="34" charset="0"/>
+                <a:ea typeface="Petrona Bold" pitchFamily="34" charset="-122"/>
+                <a:cs typeface="Petrona Bold" pitchFamily="34" charset="-120"/>
+              </a:rPr>
+              <a:t>Easy Problem: Convex Mean-Variance Optimization</a:t>
+            </a:r>
+            <a:endParaRPr lang="en-US" sz="1400" dirty="0"/>
+          </a:p>
+        </p:txBody>
+      </p:sp>
+      <p:sp>
+        <p:nvSpPr>
+          <p:cNvPr id="6" name="Shape 4"/>
+          <p:cNvSpPr/>
+          <p:nvPr/>
+        </p:nvSpPr>
+        <p:spPr>
+          <a:xfrm>
+            <a:off x="661475" y="1718171"/>
+            <a:ext cx="10868745" cy="931069"/>
+          </a:xfrm>
+          <a:prstGeom prst="roundRect">
+            <a:avLst>
+              <a:gd name="adj" fmla="val 6178"/>
+            </a:avLst>
+          </a:prstGeom>
+          <a:solidFill>
+            <a:srgbClr val="F2F2F2"/>
+          </a:solidFill>
+          <a:ln/>
+        </p:spPr>
+      </p:sp>
+      <p:sp>
+        <p:nvSpPr>
+          <p:cNvPr id="7" name="Text 5"/>
+          <p:cNvSpPr/>
+          <p:nvPr/>
+        </p:nvSpPr>
+        <p:spPr>
+          <a:xfrm>
+            <a:off x="825777" y="1855093"/>
+            <a:ext cx="10540141" cy="657225"/>
+          </a:xfrm>
+          <a:prstGeom prst="rect">
+            <a:avLst/>
+          </a:prstGeom>
+          <a:noFill/>
+          <a:ln/>
+        </p:spPr>
+        <p:txBody>
+          <a:bodyPr wrap="square" lIns="0" tIns="0" rIns="0" bIns="0" rtlCol="0" anchor="t">
+            <a:normAutofit/>
+          </a:bodyPr>
+          <a:lstStyle/>
+          <a:p>
+            <a:pPr marL="0" indent="0" algn="l">
+              <a:lnSpc>
+                <a:spcPct val="133000"/>
+              </a:lnSpc>
+              <a:buNone/>
+            </a:pPr>
+            <a:r>
+              <a:rPr lang="en-US" sz="1050" dirty="0">
+                <a:solidFill>
+                  <a:srgbClr val="24292E"/>
+                </a:solidFill>
+                <a:latin typeface="Consolas" pitchFamily="34" charset="0"/>
+                <a:ea typeface="Consolas" pitchFamily="34" charset="-122"/>
+                <a:cs typeface="Consolas" pitchFamily="34" charset="-120"/>
+              </a:rPr>
+              <a:t>maximize:  μ̂ᵀw − λ · wᵀΣw</a:t>
+            </a:r>
+            <a:endParaRPr lang="en-US" sz="1050" dirty="0"/>
+          </a:p>
+          <a:p>
+            <a:pPr marL="0" indent="0" algn="l">
+              <a:lnSpc>
+                <a:spcPct val="133000"/>
+              </a:lnSpc>
+              <a:buNone/>
+            </a:pPr>
+            <a:r>
+              <a:rPr lang="en-US" sz="1050" dirty="0">
+                <a:solidFill>
+                  <a:srgbClr val="24292E"/>
+                </a:solidFill>
+                <a:latin typeface="Consolas" pitchFamily="34" charset="0"/>
+                <a:ea typeface="Consolas" pitchFamily="34" charset="-122"/>
+                <a:cs typeface="Consolas" pitchFamily="34" charset="-120"/>
+              </a:rPr>
+              <a:t>subject to: Σ wᵢ = 1</a:t>
+            </a:r>
+            <a:endParaRPr lang="en-US" sz="1050" dirty="0"/>
+          </a:p>
+          <a:p>
+            <a:pPr marL="0" indent="0" algn="l">
+              <a:lnSpc>
+                <a:spcPct val="133000"/>
+              </a:lnSpc>
+              <a:buNone/>
+            </a:pPr>
+            <a:r>
+              <a:rPr lang="en-US" sz="1050" dirty="0">
+                <a:solidFill>
+                  <a:srgbClr val="24292E"/>
+                </a:solidFill>
+                <a:latin typeface="Consolas" pitchFamily="34" charset="0"/>
+                <a:ea typeface="Consolas" pitchFamily="34" charset="-122"/>
+                <a:cs typeface="Consolas" pitchFamily="34" charset="-120"/>
+              </a:rPr>
+              <a:t>            wᵢ ≥ 0</a:t>
+            </a:r>
+            <a:endParaRPr lang="en-US" sz="1050" dirty="0"/>
+          </a:p>
+        </p:txBody>
+      </p:sp>
+      <p:sp>
+        <p:nvSpPr>
+          <p:cNvPr id="8" name="Text 6"/>
+          <p:cNvSpPr/>
+          <p:nvPr/>
+        </p:nvSpPr>
+        <p:spPr>
+          <a:xfrm>
+            <a:off x="661475" y="2776835"/>
+            <a:ext cx="10868745" cy="919956"/>
+          </a:xfrm>
+          <a:prstGeom prst="rect">
+            <a:avLst/>
+          </a:prstGeom>
+          <a:noFill/>
+          <a:ln/>
+        </p:spPr>
+        <p:txBody>
+          <a:bodyPr wrap="square" lIns="0" tIns="0" rIns="0" bIns="0" rtlCol="0" anchor="t">
+            <a:normAutofit/>
+          </a:bodyPr>
+          <a:lstStyle/>
+          <a:p>
+            <a:pPr marL="213360" indent="-213360" algn="l">
+              <a:lnSpc>
+                <a:spcPct val="122000"/>
+              </a:lnSpc>
+              <a:buSzPct val="100000"/>
+              <a:buChar char="•"/>
+            </a:pPr>
+            <a:r>
+              <a:rPr lang="en-US" sz="1050" b="1" dirty="0">
+                <a:solidFill>
+                  <a:srgbClr val="272525"/>
+                </a:solidFill>
+                <a:latin typeface="Inter Bold" pitchFamily="34" charset="0"/>
+                <a:ea typeface="Inter Bold" pitchFamily="34" charset="-122"/>
+                <a:cs typeface="Inter Bold" pitchFamily="34" charset="-120"/>
+              </a:rPr>
+              <a:t>μ̂</a:t>
+            </a:r>
+            <a:r>
+              <a:rPr lang="en-US" sz="1050" dirty="0">
                 <a:solidFill>
                   <a:srgbClr val="272525"/>
                 </a:solidFill>
@@ -4511,30 +4592,238 @@
                 <a:ea typeface="Inter" pitchFamily="34" charset="-122"/>
                 <a:cs typeface="Inter" pitchFamily="34" charset="-120"/>
               </a:rPr>
-              <a:t>The project pipeline integrates four sequential stages. Each stage has a well-defined input and output, enabling modular development and evaluation.</a:t>
-            </a:r>
-            <a:endParaRPr lang="en-US" sz="650" dirty="0"/>
+              <a:t> = ML-predicted expected returns vector</a:t>
+            </a:r>
+            <a:endParaRPr lang="en-US" sz="1050" dirty="0"/>
+          </a:p>
+          <a:p>
+            <a:pPr marL="213360" indent="-213360" algn="l">
+              <a:lnSpc>
+                <a:spcPct val="122000"/>
+              </a:lnSpc>
+              <a:buSzPct val="100000"/>
+              <a:buChar char="•"/>
+            </a:pPr>
+            <a:r>
+              <a:rPr lang="en-US" sz="1050" b="1" dirty="0">
+                <a:solidFill>
+                  <a:srgbClr val="272525"/>
+                </a:solidFill>
+                <a:latin typeface="Inter Bold" pitchFamily="34" charset="0"/>
+                <a:ea typeface="Inter Bold" pitchFamily="34" charset="-122"/>
+                <a:cs typeface="Inter Bold" pitchFamily="34" charset="-120"/>
+              </a:rPr>
+              <a:t>Σ</a:t>
+            </a:r>
+            <a:r>
+              <a:rPr lang="en-US" sz="1050" dirty="0">
+                <a:solidFill>
+                  <a:srgbClr val="272525"/>
+                </a:solidFill>
+                <a:latin typeface="Inter" pitchFamily="34" charset="0"/>
+                <a:ea typeface="Inter" pitchFamily="34" charset="-122"/>
+                <a:cs typeface="Inter" pitchFamily="34" charset="-120"/>
+              </a:rPr>
+              <a:t> = covariance matrix encoding asset risk structure</a:t>
+            </a:r>
+            <a:endParaRPr lang="en-US" sz="1050" dirty="0"/>
+          </a:p>
+          <a:p>
+            <a:pPr marL="213360" indent="-213360" algn="l">
+              <a:lnSpc>
+                <a:spcPct val="122000"/>
+              </a:lnSpc>
+              <a:buSzPct val="100000"/>
+              <a:buChar char="•"/>
+            </a:pPr>
+            <a:r>
+              <a:rPr lang="en-US" sz="1050" b="1" dirty="0">
+                <a:solidFill>
+                  <a:srgbClr val="272525"/>
+                </a:solidFill>
+                <a:latin typeface="Inter Bold" pitchFamily="34" charset="0"/>
+                <a:ea typeface="Inter Bold" pitchFamily="34" charset="-122"/>
+                <a:cs typeface="Inter Bold" pitchFamily="34" charset="-120"/>
+              </a:rPr>
+              <a:t>w</a:t>
+            </a:r>
+            <a:r>
+              <a:rPr lang="en-US" sz="1050" dirty="0">
+                <a:solidFill>
+                  <a:srgbClr val="272525"/>
+                </a:solidFill>
+                <a:latin typeface="Inter" pitchFamily="34" charset="0"/>
+                <a:ea typeface="Inter" pitchFamily="34" charset="-122"/>
+                <a:cs typeface="Inter" pitchFamily="34" charset="-120"/>
+              </a:rPr>
+              <a:t> = portfolio weight vector (decision variable)</a:t>
+            </a:r>
+            <a:endParaRPr lang="en-US" sz="1050" dirty="0"/>
+          </a:p>
+          <a:p>
+            <a:pPr marL="213360" indent="-213360" algn="l">
+              <a:lnSpc>
+                <a:spcPct val="122000"/>
+              </a:lnSpc>
+              <a:buSzPct val="100000"/>
+              <a:buChar char="•"/>
+            </a:pPr>
+            <a:r>
+              <a:rPr lang="en-US" sz="1050" b="1" dirty="0">
+                <a:solidFill>
+                  <a:srgbClr val="272525"/>
+                </a:solidFill>
+                <a:latin typeface="Inter Bold" pitchFamily="34" charset="0"/>
+                <a:ea typeface="Inter Bold" pitchFamily="34" charset="-122"/>
+                <a:cs typeface="Inter Bold" pitchFamily="34" charset="-120"/>
+              </a:rPr>
+              <a:t>λ</a:t>
+            </a:r>
+            <a:r>
+              <a:rPr lang="en-US" sz="1050" dirty="0">
+                <a:solidFill>
+                  <a:srgbClr val="272525"/>
+                </a:solidFill>
+                <a:latin typeface="Inter" pitchFamily="34" charset="0"/>
+                <a:ea typeface="Inter" pitchFamily="34" charset="-122"/>
+                <a:cs typeface="Inter" pitchFamily="34" charset="-120"/>
+              </a:rPr>
+              <a:t> = risk-aversion parameter (controls return/risk tradeoff)</a:t>
+            </a:r>
+            <a:endParaRPr lang="en-US" sz="1050" dirty="0"/>
+          </a:p>
+        </p:txBody>
+      </p:sp>
+      <p:sp>
+        <p:nvSpPr>
+          <p:cNvPr id="9" name="Text 7"/>
+          <p:cNvSpPr/>
+          <p:nvPr/>
+        </p:nvSpPr>
+        <p:spPr>
+          <a:xfrm>
+            <a:off x="661475" y="3824387"/>
+            <a:ext cx="11478330" cy="200223"/>
+          </a:xfrm>
+          <a:prstGeom prst="rect">
+            <a:avLst/>
+          </a:prstGeom>
+          <a:noFill/>
+          <a:ln/>
+        </p:spPr>
+        <p:txBody>
+          <a:bodyPr wrap="none" lIns="0" tIns="0" rIns="0" bIns="0" rtlCol="0" anchor="t"/>
+          <a:lstStyle/>
+          <a:p>
+            <a:pPr marL="0" indent="0" algn="l">
+              <a:lnSpc>
+                <a:spcPct val="122000"/>
+              </a:lnSpc>
+              <a:buNone/>
+            </a:pPr>
+            <a:r>
+              <a:rPr lang="en-US" sz="1050" dirty="0">
+                <a:solidFill>
+                  <a:srgbClr val="272525"/>
+                </a:solidFill>
+                <a:latin typeface="Inter" pitchFamily="34" charset="0"/>
+                <a:ea typeface="Inter" pitchFamily="34" charset="-122"/>
+                <a:cs typeface="Inter" pitchFamily="34" charset="-120"/>
+              </a:rPr>
+              <a:t>This formulation is </a:t>
+            </a:r>
+            <a:r>
+              <a:rPr lang="en-US" sz="1050" b="1" dirty="0">
+                <a:solidFill>
+                  <a:srgbClr val="272525"/>
+                </a:solidFill>
+                <a:latin typeface="Inter Bold" pitchFamily="34" charset="0"/>
+                <a:ea typeface="Inter Bold" pitchFamily="34" charset="-122"/>
+                <a:cs typeface="Inter Bold" pitchFamily="34" charset="-120"/>
+              </a:rPr>
+              <a:t>convex</a:t>
+            </a:r>
+            <a:r>
+              <a:rPr lang="en-US" sz="1050" dirty="0">
+                <a:solidFill>
+                  <a:srgbClr val="272525"/>
+                </a:solidFill>
+                <a:latin typeface="Inter" pitchFamily="34" charset="0"/>
+                <a:ea typeface="Inter" pitchFamily="34" charset="-122"/>
+                <a:cs typeface="Inter" pitchFamily="34" charset="-120"/>
+              </a:rPr>
+              <a:t>—global optimum is guaranteed and solvable in polynomial time via standard QP solvers.</a:t>
+            </a:r>
+            <a:endParaRPr lang="en-US" sz="1050" dirty="0"/>
+          </a:p>
+        </p:txBody>
+      </p:sp>
+      <p:sp>
+        <p:nvSpPr>
+          <p:cNvPr id="10" name="Text 8"/>
+          <p:cNvSpPr/>
+          <p:nvPr/>
+        </p:nvSpPr>
+        <p:spPr>
+          <a:xfrm>
+            <a:off x="661475" y="4194671"/>
+            <a:ext cx="10868745" cy="224730"/>
+          </a:xfrm>
+          <a:prstGeom prst="rect">
+            <a:avLst/>
+          </a:prstGeom>
+          <a:noFill/>
+          <a:ln/>
+        </p:spPr>
+        <p:txBody>
+          <a:bodyPr wrap="none" lIns="0" tIns="0" rIns="0" bIns="0" rtlCol="0" anchor="t"/>
+          <a:lstStyle/>
+          <a:p>
+            <a:pPr marL="0" indent="0" algn="l">
+              <a:lnSpc>
+                <a:spcPct val="104000"/>
+              </a:lnSpc>
+              <a:buNone/>
+            </a:pPr>
+            <a:r>
+              <a:rPr lang="en-US" sz="1400" b="1" dirty="0">
+                <a:solidFill>
+                  <a:srgbClr val="000000"/>
+                </a:solidFill>
+                <a:latin typeface="Petrona Bold" pitchFamily="34" charset="0"/>
+                <a:ea typeface="Petrona Bold" pitchFamily="34" charset="-122"/>
+                <a:cs typeface="Petrona Bold" pitchFamily="34" charset="-120"/>
+              </a:rPr>
+              <a:t>Hard Problem: Add Realistic Trading Constraints</a:t>
+            </a:r>
+            <a:endParaRPr lang="en-US" sz="1400" dirty="0"/>
           </a:p>
         </p:txBody>
       </p:sp>
       <p:pic>
         <p:nvPicPr>
-          <p:cNvPr id="6" name="Image 0" descr="preencoded.png"/>
+          <p:cNvPr id="11" name="Image 0" descr="preencoded.png"/>
           <p:cNvPicPr>
             <a:picLocks noChangeAspect="1"/>
           </p:cNvPicPr>
           <p:nvPr/>
         </p:nvPicPr>
         <p:blipFill>
-          <a:blip r:embed="rId3"/>
+          <a:blip>
+            <a:extLst>
+              <a:ext uri="{96DAC541-7B7A-43D3-8B79-37D633B846F1}">
+                <asvg:svgBlip xmlns:asvg="http://schemas.microsoft.com/office/drawing/2016/SVG/main" r:embed="rId3"/>
+              </a:ext>
+            </a:extLst>
+          </a:blip>
           <a:stretch>
             <a:fillRect/>
           </a:stretch>
         </p:blipFill>
         <p:spPr>
           <a:xfrm>
-            <a:off x="661475" y="1092498"/>
-            <a:ext cx="10868745" cy="4694833"/>
+            <a:off x="661475" y="4589463"/>
+            <a:ext cx="2632108" cy="1405533"/>
           </a:xfrm>
           <a:prstGeom prst="rect">
             <a:avLst/>
@@ -4543,14 +4832,56 @@
       </p:pic>
       <p:sp>
         <p:nvSpPr>
-          <p:cNvPr id="7" name="Text 4"/>
-          <p:cNvSpPr/>
-          <p:nvPr/>
-        </p:nvSpPr>
-        <p:spPr>
-          <a:xfrm>
-            <a:off x="3255023" y="3955621"/>
-            <a:ext cx="1613822" cy="617262"/>
+          <p:cNvPr id="12" name="Text 9"/>
+          <p:cNvSpPr/>
+          <p:nvPr/>
+        </p:nvSpPr>
+        <p:spPr>
+          <a:xfrm>
+            <a:off x="893641" y="4745434"/>
+            <a:ext cx="2243974" cy="224730"/>
+          </a:xfrm>
+          <a:prstGeom prst="rect">
+            <a:avLst/>
+          </a:prstGeom>
+          <a:noFill/>
+          <a:ln/>
+        </p:spPr>
+        <p:txBody>
+          <a:bodyPr wrap="none" lIns="0" tIns="0" rIns="0" bIns="0" rtlCol="0" anchor="t"/>
+          <a:lstStyle/>
+          <a:p>
+            <a:pPr marL="0" indent="0" algn="l">
+              <a:lnSpc>
+                <a:spcPct val="104000"/>
+              </a:lnSpc>
+              <a:buNone/>
+            </a:pPr>
+            <a:r>
+              <a:rPr lang="en-US" sz="1400" b="1" dirty="0">
+                <a:solidFill>
+                  <a:srgbClr val="272525"/>
+                </a:solidFill>
+                <a:latin typeface="Petrona Bold" pitchFamily="34" charset="0"/>
+                <a:ea typeface="Petrona Bold" pitchFamily="34" charset="-122"/>
+                <a:cs typeface="Petrona Bold" pitchFamily="34" charset="-120"/>
+              </a:rPr>
+              <a:t>Transaction Costs</a:t>
+            </a:r>
+            <a:endParaRPr lang="en-US" sz="1400" dirty="0"/>
+          </a:p>
+        </p:txBody>
+      </p:sp>
+      <p:sp>
+        <p:nvSpPr>
+          <p:cNvPr id="13" name="Text 10"/>
+          <p:cNvSpPr/>
+          <p:nvPr/>
+        </p:nvSpPr>
+        <p:spPr>
+          <a:xfrm>
+            <a:off x="893641" y="5038130"/>
+            <a:ext cx="2243974" cy="800894"/>
           </a:xfrm>
           <a:prstGeom prst="rect">
             <a:avLst/>
@@ -4564,14 +4895,86 @@
           </a:bodyPr>
           <a:lstStyle/>
           <a:p>
-            <a:pPr marL="0" indent="0" algn="ctr">
+            <a:pPr marL="0" indent="0" algn="l">
+              <a:lnSpc>
+                <a:spcPct val="122000"/>
+              </a:lnSpc>
+              <a:buNone/>
+            </a:pPr>
+            <a:r>
+              <a:rPr lang="en-US" sz="1050" dirty="0">
+                <a:solidFill>
+                  <a:srgbClr val="272525"/>
+                </a:solidFill>
+                <a:latin typeface="Inter" pitchFamily="34" charset="0"/>
+                <a:ea typeface="Inter" pitchFamily="34" charset="-122"/>
+                <a:cs typeface="Inter" pitchFamily="34" charset="-120"/>
+              </a:rPr>
+              <a:t>Bid-ask spreads and commissions penalize frequent rebalancing. Modeled as a linear or quadratic cost term on weight changes.</a:t>
+            </a:r>
+            <a:endParaRPr lang="en-US" sz="1050" dirty="0"/>
+          </a:p>
+        </p:txBody>
+      </p:sp>
+      <p:pic>
+        <p:nvPicPr>
+          <p:cNvPr id="14" name="Image 1" descr="preencoded.png"/>
+          <p:cNvPicPr>
+            <a:picLocks noChangeAspect="1"/>
+          </p:cNvPicPr>
+          <p:nvPr/>
+        </p:nvPicPr>
+        <p:blipFill>
+          <a:blip>
+            <a:extLst>
+              <a:ext uri="{96DAC541-7B7A-43D3-8B79-37D633B846F1}">
+                <asvg:svgBlip xmlns:asvg="http://schemas.microsoft.com/office/drawing/2016/SVG/main" r:embed="rId3"/>
+              </a:ext>
+            </a:extLst>
+          </a:blip>
+          <a:stretch>
+            <a:fillRect/>
+          </a:stretch>
+        </p:blipFill>
+        <p:spPr>
+          <a:xfrm>
+            <a:off x="3406987" y="4589463"/>
+            <a:ext cx="2632108" cy="1405533"/>
+          </a:xfrm>
+          <a:prstGeom prst="rect">
+            <a:avLst/>
+          </a:prstGeom>
+        </p:spPr>
+      </p:pic>
+      <p:sp>
+        <p:nvSpPr>
+          <p:cNvPr id="15" name="Text 11"/>
+          <p:cNvSpPr/>
+          <p:nvPr/>
+        </p:nvSpPr>
+        <p:spPr>
+          <a:xfrm>
+            <a:off x="3639153" y="4745434"/>
+            <a:ext cx="2243974" cy="224730"/>
+          </a:xfrm>
+          <a:prstGeom prst="rect">
+            <a:avLst/>
+          </a:prstGeom>
+          <a:noFill/>
+          <a:ln/>
+        </p:spPr>
+        <p:txBody>
+          <a:bodyPr wrap="none" lIns="0" tIns="0" rIns="0" bIns="0" rtlCol="0" anchor="t"/>
+          <a:lstStyle/>
+          <a:p>
+            <a:pPr marL="0" indent="0" algn="l">
               <a:lnSpc>
                 <a:spcPct val="104000"/>
               </a:lnSpc>
               <a:buNone/>
             </a:pPr>
             <a:r>
-              <a:rPr lang="en-US" sz="1900" b="1" dirty="0">
+              <a:rPr lang="en-US" sz="1400" b="1" dirty="0">
                 <a:solidFill>
                   <a:srgbClr val="272525"/>
                 </a:solidFill>
@@ -4579,22 +4982,22 @@
                 <a:ea typeface="Petrona Bold" pitchFamily="34" charset="-122"/>
                 <a:cs typeface="Petrona Bold" pitchFamily="34" charset="-120"/>
               </a:rPr>
-              <a:t>ML Return Prediction</a:t>
-            </a:r>
-            <a:endParaRPr lang="en-US" sz="1900" dirty="0"/>
-          </a:p>
-        </p:txBody>
-      </p:sp>
-      <p:sp>
-        <p:nvSpPr>
-          <p:cNvPr id="8" name="Text 5"/>
-          <p:cNvSpPr/>
-          <p:nvPr/>
-        </p:nvSpPr>
-        <p:spPr>
-          <a:xfrm>
-            <a:off x="3255023" y="4656491"/>
-            <a:ext cx="1613822" cy="705442"/>
+              <a:t>Cardinality Constraints</a:t>
+            </a:r>
+            <a:endParaRPr lang="en-US" sz="1400" dirty="0"/>
+          </a:p>
+        </p:txBody>
+      </p:sp>
+      <p:sp>
+        <p:nvSpPr>
+          <p:cNvPr id="16" name="Text 12"/>
+          <p:cNvSpPr/>
+          <p:nvPr/>
+        </p:nvSpPr>
+        <p:spPr>
+          <a:xfrm>
+            <a:off x="3639153" y="5038130"/>
+            <a:ext cx="2243974" cy="800894"/>
           </a:xfrm>
           <a:prstGeom prst="rect">
             <a:avLst/>
@@ -4608,14 +5011,14 @@
           </a:bodyPr>
           <a:lstStyle/>
           <a:p>
-            <a:pPr marL="0" indent="0" algn="ctr">
-              <a:lnSpc>
-                <a:spcPct val="78000"/>
+            <a:pPr marL="0" indent="0" algn="l">
+              <a:lnSpc>
+                <a:spcPct val="122000"/>
               </a:lnSpc>
               <a:buNone/>
             </a:pPr>
             <a:r>
-              <a:rPr lang="en-US" sz="1450" dirty="0">
+              <a:rPr lang="en-US" sz="1050" dirty="0">
                 <a:solidFill>
                   <a:srgbClr val="272525"/>
                 </a:solidFill>
@@ -4623,22 +5026,94 @@
                 <a:ea typeface="Inter" pitchFamily="34" charset="-122"/>
                 <a:cs typeface="Inter" pitchFamily="34" charset="-120"/>
               </a:rPr>
-              <a:t>Train model to estimate expected returns μ̂</a:t>
-            </a:r>
-            <a:endParaRPr lang="en-US" sz="1450" dirty="0"/>
-          </a:p>
-        </p:txBody>
-      </p:sp>
-      <p:sp>
-        <p:nvSpPr>
-          <p:cNvPr id="9" name="Text 6"/>
-          <p:cNvSpPr/>
-          <p:nvPr/>
-        </p:nvSpPr>
-        <p:spPr>
-          <a:xfrm>
-            <a:off x="7398903" y="4131981"/>
-            <a:ext cx="1613822" cy="617262"/>
+              <a:t>Limit the number of assets held simultaneously. Introduces binary variables—this is what makes the problem NP-hard in general.</a:t>
+            </a:r>
+            <a:endParaRPr lang="en-US" sz="1050" dirty="0"/>
+          </a:p>
+        </p:txBody>
+      </p:sp>
+      <p:pic>
+        <p:nvPicPr>
+          <p:cNvPr id="17" name="Image 2" descr="preencoded.png"/>
+          <p:cNvPicPr>
+            <a:picLocks noChangeAspect="1"/>
+          </p:cNvPicPr>
+          <p:nvPr/>
+        </p:nvPicPr>
+        <p:blipFill>
+          <a:blip>
+            <a:extLst>
+              <a:ext uri="{96DAC541-7B7A-43D3-8B79-37D633B846F1}">
+                <asvg:svgBlip xmlns:asvg="http://schemas.microsoft.com/office/drawing/2016/SVG/main" r:embed="rId3"/>
+              </a:ext>
+            </a:extLst>
+          </a:blip>
+          <a:stretch>
+            <a:fillRect/>
+          </a:stretch>
+        </p:blipFill>
+        <p:spPr>
+          <a:xfrm>
+            <a:off x="6152500" y="4589463"/>
+            <a:ext cx="2632108" cy="1405533"/>
+          </a:xfrm>
+          <a:prstGeom prst="rect">
+            <a:avLst/>
+          </a:prstGeom>
+        </p:spPr>
+      </p:pic>
+      <p:sp>
+        <p:nvSpPr>
+          <p:cNvPr id="18" name="Text 13"/>
+          <p:cNvSpPr/>
+          <p:nvPr/>
+        </p:nvSpPr>
+        <p:spPr>
+          <a:xfrm>
+            <a:off x="6384666" y="4745434"/>
+            <a:ext cx="2243974" cy="224730"/>
+          </a:xfrm>
+          <a:prstGeom prst="rect">
+            <a:avLst/>
+          </a:prstGeom>
+          <a:noFill/>
+          <a:ln/>
+        </p:spPr>
+        <p:txBody>
+          <a:bodyPr wrap="none" lIns="0" tIns="0" rIns="0" bIns="0" rtlCol="0" anchor="t"/>
+          <a:lstStyle/>
+          <a:p>
+            <a:pPr marL="0" indent="0" algn="l">
+              <a:lnSpc>
+                <a:spcPct val="104000"/>
+              </a:lnSpc>
+              <a:buNone/>
+            </a:pPr>
+            <a:r>
+              <a:rPr lang="en-US" sz="1400" b="1" dirty="0">
+                <a:solidFill>
+                  <a:srgbClr val="272525"/>
+                </a:solidFill>
+                <a:latin typeface="Petrona Bold" pitchFamily="34" charset="0"/>
+                <a:ea typeface="Petrona Bold" pitchFamily="34" charset="-122"/>
+                <a:cs typeface="Petrona Bold" pitchFamily="34" charset="-120"/>
+              </a:rPr>
+              <a:t>Position Limits</a:t>
+            </a:r>
+            <a:endParaRPr lang="en-US" sz="1400" dirty="0"/>
+          </a:p>
+        </p:txBody>
+      </p:sp>
+      <p:sp>
+        <p:nvSpPr>
+          <p:cNvPr id="19" name="Text 14"/>
+          <p:cNvSpPr/>
+          <p:nvPr/>
+        </p:nvSpPr>
+        <p:spPr>
+          <a:xfrm>
+            <a:off x="6384666" y="5038130"/>
+            <a:ext cx="2243974" cy="800894"/>
           </a:xfrm>
           <a:prstGeom prst="rect">
             <a:avLst/>
@@ -4652,37 +5127,109 @@
           </a:bodyPr>
           <a:lstStyle/>
           <a:p>
-            <a:pPr marL="0" indent="0" algn="ctr">
+            <a:pPr marL="0" indent="0" algn="l">
+              <a:lnSpc>
+                <a:spcPct val="122000"/>
+              </a:lnSpc>
+              <a:buNone/>
+            </a:pPr>
+            <a:r>
+              <a:rPr lang="en-US" sz="1050" dirty="0">
+                <a:solidFill>
+                  <a:srgbClr val="272525"/>
+                </a:solidFill>
+                <a:latin typeface="Inter" pitchFamily="34" charset="0"/>
+                <a:ea typeface="Inter" pitchFamily="34" charset="-122"/>
+                <a:cs typeface="Inter" pitchFamily="34" charset="-120"/>
+              </a:rPr>
+              <a:t>Minimum and maximum weight per asset. Prevents over-concentration and enforces diversification mandates.</a:t>
+            </a:r>
+            <a:endParaRPr lang="en-US" sz="1050" dirty="0"/>
+          </a:p>
+        </p:txBody>
+      </p:sp>
+      <p:pic>
+        <p:nvPicPr>
+          <p:cNvPr id="20" name="Image 3" descr="preencoded.png"/>
+          <p:cNvPicPr>
+            <a:picLocks noChangeAspect="1"/>
+          </p:cNvPicPr>
+          <p:nvPr/>
+        </p:nvPicPr>
+        <p:blipFill>
+          <a:blip>
+            <a:extLst>
+              <a:ext uri="{96DAC541-7B7A-43D3-8B79-37D633B846F1}">
+                <asvg:svgBlip xmlns:asvg="http://schemas.microsoft.com/office/drawing/2016/SVG/main" r:embed="rId3"/>
+              </a:ext>
+            </a:extLst>
+          </a:blip>
+          <a:stretch>
+            <a:fillRect/>
+          </a:stretch>
+        </p:blipFill>
+        <p:spPr>
+          <a:xfrm>
+            <a:off x="8898013" y="4589463"/>
+            <a:ext cx="2632208" cy="1405533"/>
+          </a:xfrm>
+          <a:prstGeom prst="rect">
+            <a:avLst/>
+          </a:prstGeom>
+        </p:spPr>
+      </p:pic>
+      <p:sp>
+        <p:nvSpPr>
+          <p:cNvPr id="21" name="Text 15"/>
+          <p:cNvSpPr/>
+          <p:nvPr/>
+        </p:nvSpPr>
+        <p:spPr>
+          <a:xfrm>
+            <a:off x="9130179" y="4745434"/>
+            <a:ext cx="2244074" cy="224730"/>
+          </a:xfrm>
+          <a:prstGeom prst="rect">
+            <a:avLst/>
+          </a:prstGeom>
+          <a:noFill/>
+          <a:ln/>
+        </p:spPr>
+        <p:txBody>
+          <a:bodyPr wrap="none" lIns="0" tIns="0" rIns="0" bIns="0" rtlCol="0" anchor="t"/>
+          <a:lstStyle/>
+          <a:p>
+            <a:pPr marL="0" indent="0" algn="l">
               <a:lnSpc>
                 <a:spcPct val="104000"/>
               </a:lnSpc>
               <a:buNone/>
             </a:pPr>
             <a:r>
-              <a:rPr lang="en-US" sz="1900" b="1" dirty="0">
-                <a:solidFill>
-                  <a:srgbClr val="000000"/>
+              <a:rPr lang="en-US" sz="1400" b="1" dirty="0">
+                <a:solidFill>
+                  <a:srgbClr val="272525"/>
                 </a:solidFill>
                 <a:latin typeface="Petrona Bold" pitchFamily="34" charset="0"/>
                 <a:ea typeface="Petrona Bold" pitchFamily="34" charset="-122"/>
                 <a:cs typeface="Petrona Bold" pitchFamily="34" charset="-120"/>
               </a:rPr>
-              <a:t>Portfolio Optimization</a:t>
-            </a:r>
-            <a:endParaRPr lang="en-US" sz="1900" dirty="0"/>
-          </a:p>
-        </p:txBody>
-      </p:sp>
-      <p:sp>
-        <p:nvSpPr>
-          <p:cNvPr id="10" name="Text 7"/>
-          <p:cNvSpPr/>
-          <p:nvPr/>
-        </p:nvSpPr>
-        <p:spPr>
-          <a:xfrm>
-            <a:off x="7398903" y="4832851"/>
-            <a:ext cx="1613822" cy="529082"/>
+              <a:t>Turnover Constraints</a:t>
+            </a:r>
+            <a:endParaRPr lang="en-US" sz="1400" dirty="0"/>
+          </a:p>
+        </p:txBody>
+      </p:sp>
+      <p:sp>
+        <p:nvSpPr>
+          <p:cNvPr id="22" name="Text 16"/>
+          <p:cNvSpPr/>
+          <p:nvPr/>
+        </p:nvSpPr>
+        <p:spPr>
+          <a:xfrm>
+            <a:off x="9130179" y="5038130"/>
+            <a:ext cx="2244074" cy="600670"/>
           </a:xfrm>
           <a:prstGeom prst="rect">
             <a:avLst/>
@@ -4696,14 +5243,14 @@
           </a:bodyPr>
           <a:lstStyle/>
           <a:p>
-            <a:pPr marL="0" indent="0" algn="ctr">
-              <a:lnSpc>
-                <a:spcPct val="78000"/>
+            <a:pPr marL="0" indent="0" algn="l">
+              <a:lnSpc>
+                <a:spcPct val="122000"/>
               </a:lnSpc>
               <a:buNone/>
             </a:pPr>
             <a:r>
-              <a:rPr lang="en-US" sz="1450" dirty="0">
+              <a:rPr lang="en-US" sz="1050" dirty="0">
                 <a:solidFill>
                   <a:srgbClr val="272525"/>
                 </a:solidFill>
@@ -4711,22 +5258,22 @@
                 <a:ea typeface="Inter" pitchFamily="34" charset="-122"/>
                 <a:cs typeface="Inter" pitchFamily="34" charset="-120"/>
               </a:rPr>
-              <a:t>Solve for optimal weights w* under constraints</a:t>
-            </a:r>
-            <a:endParaRPr lang="en-US" sz="1450" dirty="0"/>
-          </a:p>
-        </p:txBody>
-      </p:sp>
-      <p:sp>
-        <p:nvSpPr>
-          <p:cNvPr id="11" name="Text 8"/>
-          <p:cNvSpPr/>
-          <p:nvPr/>
-        </p:nvSpPr>
-        <p:spPr>
-          <a:xfrm>
-            <a:off x="1188227" y="1516130"/>
-            <a:ext cx="1613822" cy="617262"/>
+              <a:t>Bound the total portfolio rebalancing per period, reflecting capacity and liquidity limitations.</a:t>
+            </a:r>
+            <a:endParaRPr lang="en-US" sz="1050" dirty="0"/>
+          </a:p>
+        </p:txBody>
+      </p:sp>
+      <p:sp>
+        <p:nvSpPr>
+          <p:cNvPr id="23" name="Text 17"/>
+          <p:cNvSpPr/>
+          <p:nvPr/>
+        </p:nvSpPr>
+        <p:spPr>
+          <a:xfrm>
+            <a:off x="661475" y="6122591"/>
+            <a:ext cx="11478330" cy="160139"/>
           </a:xfrm>
           <a:prstGeom prst="rect">
             <a:avLst/>
@@ -4735,63 +5282,28 @@
           <a:ln/>
         </p:spPr>
         <p:txBody>
-          <a:bodyPr wrap="square" lIns="0" tIns="0" rIns="0" bIns="0" rtlCol="0" anchor="t">
-            <a:normAutofit/>
-          </a:bodyPr>
-          <a:lstStyle/>
-          <a:p>
-            <a:pPr marL="0" indent="0" algn="ctr">
-              <a:lnSpc>
-                <a:spcPct val="104000"/>
+          <a:bodyPr wrap="none" lIns="0" tIns="0" rIns="0" bIns="0" rtlCol="0" anchor="t"/>
+          <a:lstStyle/>
+          <a:p>
+            <a:pPr marL="0" indent="0" algn="l">
+              <a:lnSpc>
+                <a:spcPct val="122000"/>
               </a:lnSpc>
               <a:buNone/>
             </a:pPr>
             <a:r>
-              <a:rPr lang="en-US" sz="1900" b="1" dirty="0">
+              <a:rPr lang="en-US" sz="850" b="1" dirty="0">
                 <a:solidFill>
                   <a:srgbClr val="272525"/>
                 </a:solidFill>
-                <a:latin typeface="Petrona Bold" pitchFamily="34" charset="0"/>
-                <a:ea typeface="Petrona Bold" pitchFamily="34" charset="-122"/>
-                <a:cs typeface="Petrona Bold" pitchFamily="34" charset="-120"/>
-              </a:rPr>
-              <a:t>Feature Engineering</a:t>
-            </a:r>
-            <a:endParaRPr lang="en-US" sz="1900" dirty="0"/>
-          </a:p>
-        </p:txBody>
-      </p:sp>
-      <p:sp>
-        <p:nvSpPr>
-          <p:cNvPr id="12" name="Text 9"/>
-          <p:cNvSpPr/>
-          <p:nvPr/>
-        </p:nvSpPr>
-        <p:spPr>
-          <a:xfrm>
-            <a:off x="1188227" y="2217000"/>
-            <a:ext cx="1613822" cy="529082"/>
-          </a:xfrm>
-          <a:prstGeom prst="rect">
-            <a:avLst/>
-          </a:prstGeom>
-          <a:noFill/>
-          <a:ln/>
-        </p:spPr>
-        <p:txBody>
-          <a:bodyPr wrap="square" lIns="0" tIns="0" rIns="0" bIns="0" rtlCol="0" anchor="t">
-            <a:normAutofit/>
-          </a:bodyPr>
-          <a:lstStyle/>
-          <a:p>
-            <a:pPr marL="0" indent="0" algn="ctr">
-              <a:lnSpc>
-                <a:spcPct val="78000"/>
-              </a:lnSpc>
-              <a:buNone/>
-            </a:pPr>
-            <a:r>
-              <a:rPr lang="en-US" sz="1450" dirty="0">
+                <a:latin typeface="Inter Bold" pitchFamily="34" charset="0"/>
+                <a:ea typeface="Inter Bold" pitchFamily="34" charset="-122"/>
+                <a:cs typeface="Inter Bold" pitchFamily="34" charset="-120"/>
+              </a:rPr>
+              <a:t>Core research question:</a:t>
+            </a:r>
+            <a:r>
+              <a:rPr lang="en-US" sz="850" dirty="0">
                 <a:solidFill>
                   <a:srgbClr val="272525"/>
                 </a:solidFill>
@@ -4799,225 +5311,7 @@
                 <a:ea typeface="Inter" pitchFamily="34" charset="-122"/>
                 <a:cs typeface="Inter" pitchFamily="34" charset="-120"/>
               </a:rPr>
-              <a:t>Extract returns, volume, macro signals</a:t>
-            </a:r>
-            <a:endParaRPr lang="en-US" sz="1450" dirty="0"/>
-          </a:p>
-        </p:txBody>
-      </p:sp>
-      <p:sp>
-        <p:nvSpPr>
-          <p:cNvPr id="13" name="Text 10"/>
-          <p:cNvSpPr/>
-          <p:nvPr/>
-        </p:nvSpPr>
-        <p:spPr>
-          <a:xfrm>
-            <a:off x="9404137" y="1516130"/>
-            <a:ext cx="1613822" cy="617262"/>
-          </a:xfrm>
-          <a:prstGeom prst="rect">
-            <a:avLst/>
-          </a:prstGeom>
-          <a:noFill/>
-          <a:ln/>
-        </p:spPr>
-        <p:txBody>
-          <a:bodyPr wrap="square" lIns="0" tIns="0" rIns="0" bIns="0" rtlCol="0" anchor="t">
-            <a:normAutofit/>
-          </a:bodyPr>
-          <a:lstStyle/>
-          <a:p>
-            <a:pPr marL="0" indent="0" algn="ctr">
-              <a:lnSpc>
-                <a:spcPct val="104000"/>
-              </a:lnSpc>
-              <a:buNone/>
-            </a:pPr>
-            <a:r>
-              <a:rPr lang="en-US" sz="1900" b="1" dirty="0">
-                <a:solidFill>
-                  <a:srgbClr val="272525"/>
-                </a:solidFill>
-                <a:latin typeface="Petrona Bold" pitchFamily="34" charset="0"/>
-                <a:ea typeface="Petrona Bold" pitchFamily="34" charset="-122"/>
-                <a:cs typeface="Petrona Bold" pitchFamily="34" charset="-120"/>
-              </a:rPr>
-              <a:t>Backtesting &amp; Evaluation</a:t>
-            </a:r>
-            <a:endParaRPr lang="en-US" sz="1900" dirty="0"/>
-          </a:p>
-        </p:txBody>
-      </p:sp>
-      <p:sp>
-        <p:nvSpPr>
-          <p:cNvPr id="14" name="Text 11"/>
-          <p:cNvSpPr/>
-          <p:nvPr/>
-        </p:nvSpPr>
-        <p:spPr>
-          <a:xfrm>
-            <a:off x="9404137" y="2217000"/>
-            <a:ext cx="1613822" cy="529082"/>
-          </a:xfrm>
-          <a:prstGeom prst="rect">
-            <a:avLst/>
-          </a:prstGeom>
-          <a:noFill/>
-          <a:ln/>
-        </p:spPr>
-        <p:txBody>
-          <a:bodyPr wrap="square" lIns="0" tIns="0" rIns="0" bIns="0" rtlCol="0" anchor="t">
-            <a:normAutofit/>
-          </a:bodyPr>
-          <a:lstStyle/>
-          <a:p>
-            <a:pPr marL="0" indent="0" algn="ctr">
-              <a:lnSpc>
-                <a:spcPct val="78000"/>
-              </a:lnSpc>
-              <a:buNone/>
-            </a:pPr>
-            <a:r>
-              <a:rPr lang="en-US" sz="1450" dirty="0">
-                <a:solidFill>
-                  <a:srgbClr val="272525"/>
-                </a:solidFill>
-                <a:latin typeface="Inter" pitchFamily="34" charset="0"/>
-                <a:ea typeface="Inter" pitchFamily="34" charset="-122"/>
-                <a:cs typeface="Inter" pitchFamily="34" charset="-120"/>
-              </a:rPr>
-              <a:t>Assess Sharpe, drawdown, and turnover</a:t>
-            </a:r>
-            <a:endParaRPr lang="en-US" sz="1450" dirty="0"/>
-          </a:p>
-        </p:txBody>
-      </p:sp>
-      <p:sp>
-        <p:nvSpPr>
-          <p:cNvPr id="15" name="Text 12"/>
-          <p:cNvSpPr/>
-          <p:nvPr/>
-        </p:nvSpPr>
-        <p:spPr>
-          <a:xfrm>
-            <a:off x="5352682" y="1516130"/>
-            <a:ext cx="1613822" cy="617262"/>
-          </a:xfrm>
-          <a:prstGeom prst="rect">
-            <a:avLst/>
-          </a:prstGeom>
-          <a:noFill/>
-          <a:ln/>
-        </p:spPr>
-        <p:txBody>
-          <a:bodyPr wrap="square" lIns="0" tIns="0" rIns="0" bIns="0" rtlCol="0" anchor="t">
-            <a:normAutofit/>
-          </a:bodyPr>
-          <a:lstStyle/>
-          <a:p>
-            <a:pPr marL="0" indent="0" algn="ctr">
-              <a:lnSpc>
-                <a:spcPct val="104000"/>
-              </a:lnSpc>
-              <a:buNone/>
-            </a:pPr>
-            <a:r>
-              <a:rPr lang="en-US" sz="1900" b="1" dirty="0">
-                <a:solidFill>
-                  <a:srgbClr val="000000"/>
-                </a:solidFill>
-                <a:latin typeface="Petrona Bold" pitchFamily="34" charset="0"/>
-                <a:ea typeface="Petrona Bold" pitchFamily="34" charset="-122"/>
-                <a:cs typeface="Petrona Bold" pitchFamily="34" charset="-120"/>
-              </a:rPr>
-              <a:t>Risk Estimation</a:t>
-            </a:r>
-            <a:endParaRPr lang="en-US" sz="1900" dirty="0"/>
-          </a:p>
-        </p:txBody>
-      </p:sp>
-      <p:sp>
-        <p:nvSpPr>
-          <p:cNvPr id="16" name="Text 13"/>
-          <p:cNvSpPr/>
-          <p:nvPr/>
-        </p:nvSpPr>
-        <p:spPr>
-          <a:xfrm>
-            <a:off x="5352682" y="2217000"/>
-            <a:ext cx="1613822" cy="529082"/>
-          </a:xfrm>
-          <a:prstGeom prst="rect">
-            <a:avLst/>
-          </a:prstGeom>
-          <a:noFill/>
-          <a:ln/>
-        </p:spPr>
-        <p:txBody>
-          <a:bodyPr wrap="square" lIns="0" tIns="0" rIns="0" bIns="0" rtlCol="0" anchor="t">
-            <a:normAutofit/>
-          </a:bodyPr>
-          <a:lstStyle/>
-          <a:p>
-            <a:pPr marL="0" indent="0" algn="ctr">
-              <a:lnSpc>
-                <a:spcPct val="78000"/>
-              </a:lnSpc>
-              <a:buNone/>
-            </a:pPr>
-            <a:r>
-              <a:rPr lang="en-US" sz="1450" dirty="0">
-                <a:solidFill>
-                  <a:srgbClr val="272525"/>
-                </a:solidFill>
-                <a:latin typeface="Inter" pitchFamily="34" charset="0"/>
-                <a:ea typeface="Inter" pitchFamily="34" charset="-122"/>
-                <a:cs typeface="Inter" pitchFamily="34" charset="-120"/>
-              </a:rPr>
-              <a:t>Compute covariance matrix Σ from returns</a:t>
-            </a:r>
-            <a:endParaRPr lang="en-US" sz="1450" dirty="0"/>
-          </a:p>
-        </p:txBody>
-      </p:sp>
-      <p:sp>
-        <p:nvSpPr>
-          <p:cNvPr id="17" name="Text 14"/>
-          <p:cNvSpPr/>
-          <p:nvPr/>
-        </p:nvSpPr>
-        <p:spPr>
-          <a:xfrm>
-            <a:off x="661475" y="5875040"/>
-            <a:ext cx="2565931" cy="135632"/>
-          </a:xfrm>
-          <a:prstGeom prst="rect">
-            <a:avLst/>
-          </a:prstGeom>
-          <a:noFill/>
-          <a:ln/>
-        </p:spPr>
-        <p:txBody>
-          <a:bodyPr wrap="none" lIns="0" tIns="0" rIns="0" bIns="0" rtlCol="0" anchor="t"/>
-          <a:lstStyle/>
-          <a:p>
-            <a:pPr marL="0" indent="0" algn="l">
-              <a:lnSpc>
-                <a:spcPct val="104000"/>
-              </a:lnSpc>
-              <a:buNone/>
-            </a:pPr>
-            <a:r>
-              <a:rPr lang="en-US" sz="850" b="1" dirty="0">
-                <a:solidFill>
-                  <a:srgbClr val="000000"/>
-                </a:solidFill>
-                <a:latin typeface="Petrona Bold" pitchFamily="34" charset="0"/>
-                <a:ea typeface="Petrona Bold" pitchFamily="34" charset="-122"/>
-                <a:cs typeface="Petrona Bold" pitchFamily="34" charset="-120"/>
-              </a:rPr>
-              <a:t>① Feature Engineering</a:t>
+              <a:t> How much do constraints change the optimal portfolio and its performance? Quantifying this "price of realism" is the central contribution.</a:t>
             </a:r>
             <a:endParaRPr lang="en-US" sz="850" dirty="0"/>
           </a:p>
@@ -5025,378 +5319,10 @@
       </p:sp>
       <p:sp>
         <p:nvSpPr>
-          <p:cNvPr id="18" name="Text 15"/>
-          <p:cNvSpPr/>
-          <p:nvPr/>
-        </p:nvSpPr>
-        <p:spPr>
-          <a:xfrm>
-            <a:off x="661475" y="6051947"/>
-            <a:ext cx="2565931" cy="297359"/>
-          </a:xfrm>
-          <a:prstGeom prst="rect">
-            <a:avLst/>
-          </a:prstGeom>
-          <a:noFill/>
-          <a:ln/>
-        </p:spPr>
-        <p:txBody>
-          <a:bodyPr wrap="square" lIns="0" tIns="0" rIns="0" bIns="0" rtlCol="0" anchor="t">
-            <a:normAutofit/>
-          </a:bodyPr>
-          <a:lstStyle/>
-          <a:p>
-            <a:pPr marL="0" indent="0" algn="l">
-              <a:lnSpc>
-                <a:spcPct val="100000"/>
-              </a:lnSpc>
-              <a:buNone/>
-            </a:pPr>
-            <a:r>
-              <a:rPr lang="en-US" sz="650" dirty="0">
-                <a:solidFill>
-                  <a:srgbClr val="272525"/>
-                </a:solidFill>
-                <a:latin typeface="Inter" pitchFamily="34" charset="0"/>
-                <a:ea typeface="Inter" pitchFamily="34" charset="-122"/>
-                <a:cs typeface="Inter" pitchFamily="34" charset="-120"/>
-              </a:rPr>
-              <a:t>Transform raw price and volume data into predictive signals: momentum, moving averages, volatility measures, and macro indicators.</a:t>
-            </a:r>
-            <a:endParaRPr lang="en-US" sz="650" dirty="0"/>
-          </a:p>
-        </p:txBody>
-      </p:sp>
-      <p:sp>
-        <p:nvSpPr>
-          <p:cNvPr id="19" name="Text 16"/>
-          <p:cNvSpPr/>
-          <p:nvPr/>
-        </p:nvSpPr>
-        <p:spPr>
-          <a:xfrm>
-            <a:off x="3435363" y="5875040"/>
-            <a:ext cx="2565931" cy="135632"/>
-          </a:xfrm>
-          <a:prstGeom prst="rect">
-            <a:avLst/>
-          </a:prstGeom>
-          <a:noFill/>
-          <a:ln/>
-        </p:spPr>
-        <p:txBody>
-          <a:bodyPr wrap="none" lIns="0" tIns="0" rIns="0" bIns="0" rtlCol="0" anchor="t"/>
-          <a:lstStyle/>
-          <a:p>
-            <a:pPr marL="0" indent="0" algn="l">
-              <a:lnSpc>
-                <a:spcPct val="104000"/>
-              </a:lnSpc>
-              <a:buNone/>
-            </a:pPr>
-            <a:r>
-              <a:rPr lang="en-US" sz="850" b="1" dirty="0">
-                <a:solidFill>
-                  <a:srgbClr val="000000"/>
-                </a:solidFill>
-                <a:latin typeface="Petrona Bold" pitchFamily="34" charset="0"/>
-                <a:ea typeface="Petrona Bold" pitchFamily="34" charset="-122"/>
-                <a:cs typeface="Petrona Bold" pitchFamily="34" charset="-120"/>
-              </a:rPr>
-              <a:t>② ML Prediction</a:t>
-            </a:r>
-            <a:endParaRPr lang="en-US" sz="850" dirty="0"/>
-          </a:p>
-        </p:txBody>
-      </p:sp>
-      <p:sp>
-        <p:nvSpPr>
-          <p:cNvPr id="20" name="Text 17"/>
-          <p:cNvSpPr/>
-          <p:nvPr/>
-        </p:nvSpPr>
-        <p:spPr>
-          <a:xfrm>
-            <a:off x="3435363" y="6051947"/>
-            <a:ext cx="2565931" cy="198239"/>
-          </a:xfrm>
-          <a:prstGeom prst="rect">
-            <a:avLst/>
-          </a:prstGeom>
-          <a:noFill/>
-          <a:ln/>
-        </p:spPr>
-        <p:txBody>
-          <a:bodyPr wrap="square" lIns="0" tIns="0" rIns="0" bIns="0" rtlCol="0" anchor="t">
-            <a:normAutofit/>
-          </a:bodyPr>
-          <a:lstStyle/>
-          <a:p>
-            <a:pPr marL="0" indent="0" algn="l">
-              <a:lnSpc>
-                <a:spcPct val="100000"/>
-              </a:lnSpc>
-              <a:buNone/>
-            </a:pPr>
-            <a:r>
-              <a:rPr lang="en-US" sz="650" dirty="0">
-                <a:solidFill>
-                  <a:srgbClr val="272525"/>
-                </a:solidFill>
-                <a:latin typeface="Inter" pitchFamily="34" charset="0"/>
-                <a:ea typeface="Inter" pitchFamily="34" charset="-122"/>
-                <a:cs typeface="Inter" pitchFamily="34" charset="-120"/>
-              </a:rPr>
-              <a:t>Train a supervised model to forecast next-period asset returns. Output is </a:t>
-            </a:r>
-            <a:r>
-              <a:rPr lang="en-US" sz="650" b="1" dirty="0">
-                <a:solidFill>
-                  <a:srgbClr val="272525"/>
-                </a:solidFill>
-                <a:latin typeface="Inter Bold" pitchFamily="34" charset="0"/>
-                <a:ea typeface="Inter Bold" pitchFamily="34" charset="-122"/>
-                <a:cs typeface="Inter Bold" pitchFamily="34" charset="-120"/>
-              </a:rPr>
-              <a:t>μ̂</a:t>
-            </a:r>
-            <a:r>
-              <a:rPr lang="en-US" sz="650" dirty="0">
-                <a:solidFill>
-                  <a:srgbClr val="272525"/>
-                </a:solidFill>
-                <a:latin typeface="Inter" pitchFamily="34" charset="0"/>
-                <a:ea typeface="Inter" pitchFamily="34" charset="-122"/>
-                <a:cs typeface="Inter" pitchFamily="34" charset="-120"/>
-              </a:rPr>
-              <a:t>, a vector of expected returns for all assets.</a:t>
-            </a:r>
-            <a:endParaRPr lang="en-US" sz="650" dirty="0"/>
-          </a:p>
-        </p:txBody>
-      </p:sp>
-      <p:sp>
-        <p:nvSpPr>
-          <p:cNvPr id="21" name="Text 18"/>
-          <p:cNvSpPr/>
-          <p:nvPr/>
-        </p:nvSpPr>
-        <p:spPr>
-          <a:xfrm>
-            <a:off x="6209252" y="5875040"/>
-            <a:ext cx="2565931" cy="135632"/>
-          </a:xfrm>
-          <a:prstGeom prst="rect">
-            <a:avLst/>
-          </a:prstGeom>
-          <a:noFill/>
-          <a:ln/>
-        </p:spPr>
-        <p:txBody>
-          <a:bodyPr wrap="none" lIns="0" tIns="0" rIns="0" bIns="0" rtlCol="0" anchor="t"/>
-          <a:lstStyle/>
-          <a:p>
-            <a:pPr marL="0" indent="0" algn="l">
-              <a:lnSpc>
-                <a:spcPct val="104000"/>
-              </a:lnSpc>
-              <a:buNone/>
-            </a:pPr>
-            <a:r>
-              <a:rPr lang="en-US" sz="850" b="1" dirty="0">
-                <a:solidFill>
-                  <a:srgbClr val="000000"/>
-                </a:solidFill>
-                <a:latin typeface="Petrona Bold" pitchFamily="34" charset="0"/>
-                <a:ea typeface="Petrona Bold" pitchFamily="34" charset="-122"/>
-                <a:cs typeface="Petrona Bold" pitchFamily="34" charset="-120"/>
-              </a:rPr>
-              <a:t>③ Optimization</a:t>
-            </a:r>
-            <a:endParaRPr lang="en-US" sz="850" dirty="0"/>
-          </a:p>
-        </p:txBody>
-      </p:sp>
-      <p:sp>
-        <p:nvSpPr>
-          <p:cNvPr id="22" name="Text 19"/>
-          <p:cNvSpPr/>
-          <p:nvPr/>
-        </p:nvSpPr>
-        <p:spPr>
-          <a:xfrm>
-            <a:off x="6209252" y="6051947"/>
-            <a:ext cx="2565931" cy="198239"/>
-          </a:xfrm>
-          <a:prstGeom prst="rect">
-            <a:avLst/>
-          </a:prstGeom>
-          <a:noFill/>
-          <a:ln/>
-        </p:spPr>
-        <p:txBody>
-          <a:bodyPr wrap="square" lIns="0" tIns="0" rIns="0" bIns="0" rtlCol="0" anchor="t">
-            <a:normAutofit/>
-          </a:bodyPr>
-          <a:lstStyle/>
-          <a:p>
-            <a:pPr marL="0" indent="0" algn="l">
-              <a:lnSpc>
-                <a:spcPct val="100000"/>
-              </a:lnSpc>
-              <a:buNone/>
-            </a:pPr>
-            <a:r>
-              <a:rPr lang="en-US" sz="650" dirty="0">
-                <a:solidFill>
-                  <a:srgbClr val="272525"/>
-                </a:solidFill>
-                <a:latin typeface="Inter" pitchFamily="34" charset="0"/>
-                <a:ea typeface="Inter" pitchFamily="34" charset="-122"/>
-                <a:cs typeface="Inter" pitchFamily="34" charset="-120"/>
-              </a:rPr>
-              <a:t>Combine </a:t>
-            </a:r>
-            <a:r>
-              <a:rPr lang="en-US" sz="650" b="1" dirty="0">
-                <a:solidFill>
-                  <a:srgbClr val="272525"/>
-                </a:solidFill>
-                <a:latin typeface="Inter Bold" pitchFamily="34" charset="0"/>
-                <a:ea typeface="Inter Bold" pitchFamily="34" charset="-122"/>
-                <a:cs typeface="Inter Bold" pitchFamily="34" charset="-120"/>
-              </a:rPr>
-              <a:t>μ̂</a:t>
-            </a:r>
-            <a:r>
-              <a:rPr lang="en-US" sz="650" dirty="0">
-                <a:solidFill>
-                  <a:srgbClr val="272525"/>
-                </a:solidFill>
-                <a:latin typeface="Inter" pitchFamily="34" charset="0"/>
-                <a:ea typeface="Inter" pitchFamily="34" charset="-122"/>
-                <a:cs typeface="Inter" pitchFamily="34" charset="-120"/>
-              </a:rPr>
-              <a:t> with estimated covariance </a:t>
-            </a:r>
-            <a:r>
-              <a:rPr lang="en-US" sz="650" b="1" dirty="0">
-                <a:solidFill>
-                  <a:srgbClr val="272525"/>
-                </a:solidFill>
-                <a:latin typeface="Inter Bold" pitchFamily="34" charset="0"/>
-                <a:ea typeface="Inter Bold" pitchFamily="34" charset="-122"/>
-                <a:cs typeface="Inter Bold" pitchFamily="34" charset="-120"/>
-              </a:rPr>
-              <a:t>Σ</a:t>
-            </a:r>
-            <a:r>
-              <a:rPr lang="en-US" sz="650" dirty="0">
-                <a:solidFill>
-                  <a:srgbClr val="272525"/>
-                </a:solidFill>
-                <a:latin typeface="Inter" pitchFamily="34" charset="0"/>
-                <a:ea typeface="Inter" pitchFamily="34" charset="-122"/>
-                <a:cs typeface="Inter" pitchFamily="34" charset="-120"/>
-              </a:rPr>
-              <a:t> and solve the portfolio optimization problem—first convex, then constrained.</a:t>
-            </a:r>
-            <a:endParaRPr lang="en-US" sz="650" dirty="0"/>
-          </a:p>
-        </p:txBody>
-      </p:sp>
-      <p:sp>
-        <p:nvSpPr>
-          <p:cNvPr id="23" name="Text 20"/>
-          <p:cNvSpPr/>
-          <p:nvPr/>
-        </p:nvSpPr>
-        <p:spPr>
-          <a:xfrm>
-            <a:off x="8983140" y="5875040"/>
-            <a:ext cx="2565931" cy="135632"/>
-          </a:xfrm>
-          <a:prstGeom prst="rect">
-            <a:avLst/>
-          </a:prstGeom>
-          <a:noFill/>
-          <a:ln/>
-        </p:spPr>
-        <p:txBody>
-          <a:bodyPr wrap="none" lIns="0" tIns="0" rIns="0" bIns="0" rtlCol="0" anchor="t"/>
-          <a:lstStyle/>
-          <a:p>
-            <a:pPr marL="0" indent="0" algn="l">
-              <a:lnSpc>
-                <a:spcPct val="104000"/>
-              </a:lnSpc>
-              <a:buNone/>
-            </a:pPr>
-            <a:r>
-              <a:rPr lang="en-US" sz="850" b="1" dirty="0">
-                <a:solidFill>
-                  <a:srgbClr val="000000"/>
-                </a:solidFill>
-                <a:latin typeface="Petrona Bold" pitchFamily="34" charset="0"/>
-                <a:ea typeface="Petrona Bold" pitchFamily="34" charset="-122"/>
-                <a:cs typeface="Petrona Bold" pitchFamily="34" charset="-120"/>
-              </a:rPr>
-              <a:t>④ Backtesting</a:t>
-            </a:r>
-            <a:endParaRPr lang="en-US" sz="850" dirty="0"/>
-          </a:p>
-        </p:txBody>
-      </p:sp>
-      <p:sp>
-        <p:nvSpPr>
-          <p:cNvPr id="24" name="Text 21"/>
-          <p:cNvSpPr/>
-          <p:nvPr/>
-        </p:nvSpPr>
-        <p:spPr>
-          <a:xfrm>
-            <a:off x="8983140" y="6051947"/>
-            <a:ext cx="2565931" cy="198239"/>
-          </a:xfrm>
-          <a:prstGeom prst="rect">
-            <a:avLst/>
-          </a:prstGeom>
-          <a:noFill/>
-          <a:ln/>
-        </p:spPr>
-        <p:txBody>
-          <a:bodyPr wrap="square" lIns="0" tIns="0" rIns="0" bIns="0" rtlCol="0" anchor="t">
-            <a:normAutofit/>
-          </a:bodyPr>
-          <a:lstStyle/>
-          <a:p>
-            <a:pPr marL="0" indent="0" algn="l">
-              <a:lnSpc>
-                <a:spcPct val="100000"/>
-              </a:lnSpc>
-              <a:buNone/>
-            </a:pPr>
-            <a:r>
-              <a:rPr lang="en-US" sz="650" dirty="0">
-                <a:solidFill>
-                  <a:srgbClr val="272525"/>
-                </a:solidFill>
-                <a:latin typeface="Inter" pitchFamily="34" charset="0"/>
-                <a:ea typeface="Inter" pitchFamily="34" charset="-122"/>
-                <a:cs typeface="Inter" pitchFamily="34" charset="-120"/>
-              </a:rPr>
-              <a:t>Simulate portfolio rebalancing on the held-out period. Compute return, Sharpe ratio, max drawdown, and transaction costs.</a:t>
-            </a:r>
-            <a:endParaRPr lang="en-US" sz="650" dirty="0"/>
-          </a:p>
-        </p:txBody>
-      </p:sp>
-      <p:sp>
-        <p:nvSpPr>
-          <p:cNvPr id="26" name="Rectangle 25">
+          <p:cNvPr id="25" name="Rectangle 24">
             <a:extLst>
               <a:ext uri="{FF2B5EF4-FFF2-40B4-BE49-F238E27FC236}">
-                <a16:creationId xmlns:a16="http://schemas.microsoft.com/office/drawing/2014/main" id="{7AF90076-4CB2-CA4E-1E3E-4B691BD87D4B}"/>
+                <a16:creationId xmlns:a16="http://schemas.microsoft.com/office/drawing/2014/main" id="{370A68CE-7831-3303-7D92-A09F9079490E}"/>
               </a:ext>
             </a:extLst>
           </p:cNvPr>
@@ -5453,1112 +5379,6 @@
 
 <file path=ppt/slides/slide6.xml><?xml version="1.0" encoding="utf-8"?>
 <p:sld xmlns:a="http://schemas.openxmlformats.org/drawingml/2006/main" xmlns:r="http://schemas.openxmlformats.org/officeDocument/2006/relationships" xmlns:p="http://schemas.openxmlformats.org/presentationml/2006/main">
-  <p:cSld name="Slide 5">
-    <p:spTree>
-      <p:nvGrpSpPr>
-        <p:cNvPr id="1" name=""/>
-        <p:cNvGrpSpPr/>
-        <p:nvPr/>
-      </p:nvGrpSpPr>
-      <p:grpSpPr>
-        <a:xfrm>
-          <a:off x="0" y="0"/>
-          <a:ext cx="0" cy="0"/>
-          <a:chOff x="0" y="0"/>
-          <a:chExt cx="0" cy="0"/>
-        </a:xfrm>
-      </p:grpSpPr>
-      <p:sp>
-        <p:nvSpPr>
-          <p:cNvPr id="2" name="Shape 0"/>
-          <p:cNvSpPr/>
-          <p:nvPr/>
-        </p:nvSpPr>
-        <p:spPr>
-          <a:xfrm>
-            <a:off x="661475" y="575171"/>
-            <a:ext cx="1772895" cy="208062"/>
-          </a:xfrm>
-          <a:prstGeom prst="roundRect">
-            <a:avLst>
-              <a:gd name="adj" fmla="val 22118"/>
-            </a:avLst>
-          </a:prstGeom>
-          <a:solidFill>
-            <a:srgbClr val="CCEEFF"/>
-          </a:solidFill>
-          <a:ln/>
-        </p:spPr>
-      </p:sp>
-      <p:sp>
-        <p:nvSpPr>
-          <p:cNvPr id="3" name="Text 1"/>
-          <p:cNvSpPr/>
-          <p:nvPr/>
-        </p:nvSpPr>
-        <p:spPr>
-          <a:xfrm>
-            <a:off x="743626" y="616248"/>
-            <a:ext cx="2218178" cy="125909"/>
-          </a:xfrm>
-          <a:prstGeom prst="rect">
-            <a:avLst/>
-          </a:prstGeom>
-          <a:noFill/>
-          <a:ln/>
-        </p:spPr>
-        <p:txBody>
-          <a:bodyPr wrap="none" lIns="0" tIns="0" rIns="0" bIns="0" rtlCol="0" anchor="t"/>
-          <a:lstStyle/>
-          <a:p>
-            <a:pPr marL="0" indent="0" algn="l">
-              <a:lnSpc>
-                <a:spcPct val="96000"/>
-              </a:lnSpc>
-              <a:buNone/>
-            </a:pPr>
-            <a:r>
-              <a:rPr lang="en-US" sz="850" dirty="0">
-                <a:solidFill>
-                  <a:srgbClr val="272525"/>
-                </a:solidFill>
-                <a:latin typeface="Inter" pitchFamily="34" charset="0"/>
-                <a:ea typeface="Inter" pitchFamily="34" charset="-122"/>
-                <a:cs typeface="Inter" pitchFamily="34" charset="-120"/>
-              </a:rPr>
-              <a:t>OPTIMIZATION FORMULATION</a:t>
-            </a:r>
-            <a:endParaRPr lang="en-US" sz="850" dirty="0"/>
-          </a:p>
-        </p:txBody>
-      </p:sp>
-      <p:sp>
-        <p:nvSpPr>
-          <p:cNvPr id="4" name="Text 2"/>
-          <p:cNvSpPr/>
-          <p:nvPr/>
-        </p:nvSpPr>
-        <p:spPr>
-          <a:xfrm>
-            <a:off x="661475" y="828576"/>
-            <a:ext cx="10868745" cy="449461"/>
-          </a:xfrm>
-          <a:prstGeom prst="rect">
-            <a:avLst/>
-          </a:prstGeom>
-          <a:noFill/>
-          <a:ln/>
-        </p:spPr>
-        <p:txBody>
-          <a:bodyPr wrap="none" lIns="0" tIns="0" rIns="0" bIns="0" rtlCol="0" anchor="t"/>
-          <a:lstStyle/>
-          <a:p>
-            <a:pPr marL="0" indent="0" algn="l">
-              <a:lnSpc>
-                <a:spcPct val="104000"/>
-              </a:lnSpc>
-              <a:buNone/>
-            </a:pPr>
-            <a:r>
-              <a:rPr lang="en-US" sz="2800" b="1" dirty="0">
-                <a:solidFill>
-                  <a:srgbClr val="000000"/>
-                </a:solidFill>
-                <a:latin typeface="Petrona Bold" pitchFamily="34" charset="0"/>
-                <a:ea typeface="Petrona Bold" pitchFamily="34" charset="-122"/>
-                <a:cs typeface="Petrona Bold" pitchFamily="34" charset="-120"/>
-              </a:rPr>
-              <a:t>From Idealized to Realistic Portfolio Optimization</a:t>
-            </a:r>
-            <a:endParaRPr lang="en-US" sz="2800" dirty="0"/>
-          </a:p>
-        </p:txBody>
-      </p:sp>
-      <p:sp>
-        <p:nvSpPr>
-          <p:cNvPr id="5" name="Text 3"/>
-          <p:cNvSpPr/>
-          <p:nvPr/>
-        </p:nvSpPr>
-        <p:spPr>
-          <a:xfrm>
-            <a:off x="661475" y="1323380"/>
-            <a:ext cx="10868745" cy="224730"/>
-          </a:xfrm>
-          <a:prstGeom prst="rect">
-            <a:avLst/>
-          </a:prstGeom>
-          <a:noFill/>
-          <a:ln/>
-        </p:spPr>
-        <p:txBody>
-          <a:bodyPr wrap="none" lIns="0" tIns="0" rIns="0" bIns="0" rtlCol="0" anchor="t"/>
-          <a:lstStyle/>
-          <a:p>
-            <a:pPr marL="0" indent="0" algn="l">
-              <a:lnSpc>
-                <a:spcPct val="104000"/>
-              </a:lnSpc>
-              <a:buNone/>
-            </a:pPr>
-            <a:r>
-              <a:rPr lang="en-US" sz="1400" b="1" dirty="0">
-                <a:solidFill>
-                  <a:srgbClr val="000000"/>
-                </a:solidFill>
-                <a:latin typeface="Petrona Bold" pitchFamily="34" charset="0"/>
-                <a:ea typeface="Petrona Bold" pitchFamily="34" charset="-122"/>
-                <a:cs typeface="Petrona Bold" pitchFamily="34" charset="-120"/>
-              </a:rPr>
-              <a:t>Easy Problem: Convex Mean-Variance Optimization</a:t>
-            </a:r>
-            <a:endParaRPr lang="en-US" sz="1400" dirty="0"/>
-          </a:p>
-        </p:txBody>
-      </p:sp>
-      <p:sp>
-        <p:nvSpPr>
-          <p:cNvPr id="6" name="Shape 4"/>
-          <p:cNvSpPr/>
-          <p:nvPr/>
-        </p:nvSpPr>
-        <p:spPr>
-          <a:xfrm>
-            <a:off x="661475" y="1718171"/>
-            <a:ext cx="10868745" cy="931069"/>
-          </a:xfrm>
-          <a:prstGeom prst="roundRect">
-            <a:avLst>
-              <a:gd name="adj" fmla="val 6178"/>
-            </a:avLst>
-          </a:prstGeom>
-          <a:solidFill>
-            <a:srgbClr val="F2F2F2"/>
-          </a:solidFill>
-          <a:ln/>
-        </p:spPr>
-      </p:sp>
-      <p:sp>
-        <p:nvSpPr>
-          <p:cNvPr id="7" name="Text 5"/>
-          <p:cNvSpPr/>
-          <p:nvPr/>
-        </p:nvSpPr>
-        <p:spPr>
-          <a:xfrm>
-            <a:off x="825777" y="1855093"/>
-            <a:ext cx="10540141" cy="657225"/>
-          </a:xfrm>
-          <a:prstGeom prst="rect">
-            <a:avLst/>
-          </a:prstGeom>
-          <a:noFill/>
-          <a:ln/>
-        </p:spPr>
-        <p:txBody>
-          <a:bodyPr wrap="square" lIns="0" tIns="0" rIns="0" bIns="0" rtlCol="0" anchor="t">
-            <a:normAutofit/>
-          </a:bodyPr>
-          <a:lstStyle/>
-          <a:p>
-            <a:pPr marL="0" indent="0" algn="l">
-              <a:lnSpc>
-                <a:spcPct val="133000"/>
-              </a:lnSpc>
-              <a:buNone/>
-            </a:pPr>
-            <a:r>
-              <a:rPr lang="en-US" sz="1050" dirty="0">
-                <a:solidFill>
-                  <a:srgbClr val="24292E"/>
-                </a:solidFill>
-                <a:latin typeface="Consolas" pitchFamily="34" charset="0"/>
-                <a:ea typeface="Consolas" pitchFamily="34" charset="-122"/>
-                <a:cs typeface="Consolas" pitchFamily="34" charset="-120"/>
-              </a:rPr>
-              <a:t>maximize:  μ̂ᵀw − λ · wᵀΣw</a:t>
-            </a:r>
-            <a:endParaRPr lang="en-US" sz="1050" dirty="0"/>
-          </a:p>
-          <a:p>
-            <a:pPr marL="0" indent="0" algn="l">
-              <a:lnSpc>
-                <a:spcPct val="133000"/>
-              </a:lnSpc>
-              <a:buNone/>
-            </a:pPr>
-            <a:r>
-              <a:rPr lang="en-US" sz="1050" dirty="0">
-                <a:solidFill>
-                  <a:srgbClr val="24292E"/>
-                </a:solidFill>
-                <a:latin typeface="Consolas" pitchFamily="34" charset="0"/>
-                <a:ea typeface="Consolas" pitchFamily="34" charset="-122"/>
-                <a:cs typeface="Consolas" pitchFamily="34" charset="-120"/>
-              </a:rPr>
-              <a:t>subject to: Σ wᵢ = 1</a:t>
-            </a:r>
-            <a:endParaRPr lang="en-US" sz="1050" dirty="0"/>
-          </a:p>
-          <a:p>
-            <a:pPr marL="0" indent="0" algn="l">
-              <a:lnSpc>
-                <a:spcPct val="133000"/>
-              </a:lnSpc>
-              <a:buNone/>
-            </a:pPr>
-            <a:r>
-              <a:rPr lang="en-US" sz="1050" dirty="0">
-                <a:solidFill>
-                  <a:srgbClr val="24292E"/>
-                </a:solidFill>
-                <a:latin typeface="Consolas" pitchFamily="34" charset="0"/>
-                <a:ea typeface="Consolas" pitchFamily="34" charset="-122"/>
-                <a:cs typeface="Consolas" pitchFamily="34" charset="-120"/>
-              </a:rPr>
-              <a:t>            wᵢ ≥ 0</a:t>
-            </a:r>
-            <a:endParaRPr lang="en-US" sz="1050" dirty="0"/>
-          </a:p>
-        </p:txBody>
-      </p:sp>
-      <p:sp>
-        <p:nvSpPr>
-          <p:cNvPr id="8" name="Text 6"/>
-          <p:cNvSpPr/>
-          <p:nvPr/>
-        </p:nvSpPr>
-        <p:spPr>
-          <a:xfrm>
-            <a:off x="661475" y="2776835"/>
-            <a:ext cx="10868745" cy="919956"/>
-          </a:xfrm>
-          <a:prstGeom prst="rect">
-            <a:avLst/>
-          </a:prstGeom>
-          <a:noFill/>
-          <a:ln/>
-        </p:spPr>
-        <p:txBody>
-          <a:bodyPr wrap="square" lIns="0" tIns="0" rIns="0" bIns="0" rtlCol="0" anchor="t">
-            <a:normAutofit/>
-          </a:bodyPr>
-          <a:lstStyle/>
-          <a:p>
-            <a:pPr marL="213360" indent="-213360" algn="l">
-              <a:lnSpc>
-                <a:spcPct val="122000"/>
-              </a:lnSpc>
-              <a:buSzPct val="100000"/>
-              <a:buChar char="•"/>
-            </a:pPr>
-            <a:r>
-              <a:rPr lang="en-US" sz="1050" b="1" dirty="0">
-                <a:solidFill>
-                  <a:srgbClr val="272525"/>
-                </a:solidFill>
-                <a:latin typeface="Inter Bold" pitchFamily="34" charset="0"/>
-                <a:ea typeface="Inter Bold" pitchFamily="34" charset="-122"/>
-                <a:cs typeface="Inter Bold" pitchFamily="34" charset="-120"/>
-              </a:rPr>
-              <a:t>μ̂</a:t>
-            </a:r>
-            <a:r>
-              <a:rPr lang="en-US" sz="1050" dirty="0">
-                <a:solidFill>
-                  <a:srgbClr val="272525"/>
-                </a:solidFill>
-                <a:latin typeface="Inter" pitchFamily="34" charset="0"/>
-                <a:ea typeface="Inter" pitchFamily="34" charset="-122"/>
-                <a:cs typeface="Inter" pitchFamily="34" charset="-120"/>
-              </a:rPr>
-              <a:t> = ML-predicted expected returns vector</a:t>
-            </a:r>
-            <a:endParaRPr lang="en-US" sz="1050" dirty="0"/>
-          </a:p>
-          <a:p>
-            <a:pPr marL="213360" indent="-213360" algn="l">
-              <a:lnSpc>
-                <a:spcPct val="122000"/>
-              </a:lnSpc>
-              <a:buSzPct val="100000"/>
-              <a:buChar char="•"/>
-            </a:pPr>
-            <a:r>
-              <a:rPr lang="en-US" sz="1050" b="1" dirty="0">
-                <a:solidFill>
-                  <a:srgbClr val="272525"/>
-                </a:solidFill>
-                <a:latin typeface="Inter Bold" pitchFamily="34" charset="0"/>
-                <a:ea typeface="Inter Bold" pitchFamily="34" charset="-122"/>
-                <a:cs typeface="Inter Bold" pitchFamily="34" charset="-120"/>
-              </a:rPr>
-              <a:t>Σ</a:t>
-            </a:r>
-            <a:r>
-              <a:rPr lang="en-US" sz="1050" dirty="0">
-                <a:solidFill>
-                  <a:srgbClr val="272525"/>
-                </a:solidFill>
-                <a:latin typeface="Inter" pitchFamily="34" charset="0"/>
-                <a:ea typeface="Inter" pitchFamily="34" charset="-122"/>
-                <a:cs typeface="Inter" pitchFamily="34" charset="-120"/>
-              </a:rPr>
-              <a:t> = covariance matrix encoding asset risk structure</a:t>
-            </a:r>
-            <a:endParaRPr lang="en-US" sz="1050" dirty="0"/>
-          </a:p>
-          <a:p>
-            <a:pPr marL="213360" indent="-213360" algn="l">
-              <a:lnSpc>
-                <a:spcPct val="122000"/>
-              </a:lnSpc>
-              <a:buSzPct val="100000"/>
-              <a:buChar char="•"/>
-            </a:pPr>
-            <a:r>
-              <a:rPr lang="en-US" sz="1050" b="1" dirty="0">
-                <a:solidFill>
-                  <a:srgbClr val="272525"/>
-                </a:solidFill>
-                <a:latin typeface="Inter Bold" pitchFamily="34" charset="0"/>
-                <a:ea typeface="Inter Bold" pitchFamily="34" charset="-122"/>
-                <a:cs typeface="Inter Bold" pitchFamily="34" charset="-120"/>
-              </a:rPr>
-              <a:t>w</a:t>
-            </a:r>
-            <a:r>
-              <a:rPr lang="en-US" sz="1050" dirty="0">
-                <a:solidFill>
-                  <a:srgbClr val="272525"/>
-                </a:solidFill>
-                <a:latin typeface="Inter" pitchFamily="34" charset="0"/>
-                <a:ea typeface="Inter" pitchFamily="34" charset="-122"/>
-                <a:cs typeface="Inter" pitchFamily="34" charset="-120"/>
-              </a:rPr>
-              <a:t> = portfolio weight vector (decision variable)</a:t>
-            </a:r>
-            <a:endParaRPr lang="en-US" sz="1050" dirty="0"/>
-          </a:p>
-          <a:p>
-            <a:pPr marL="213360" indent="-213360" algn="l">
-              <a:lnSpc>
-                <a:spcPct val="122000"/>
-              </a:lnSpc>
-              <a:buSzPct val="100000"/>
-              <a:buChar char="•"/>
-            </a:pPr>
-            <a:r>
-              <a:rPr lang="en-US" sz="1050" b="1" dirty="0">
-                <a:solidFill>
-                  <a:srgbClr val="272525"/>
-                </a:solidFill>
-                <a:latin typeface="Inter Bold" pitchFamily="34" charset="0"/>
-                <a:ea typeface="Inter Bold" pitchFamily="34" charset="-122"/>
-                <a:cs typeface="Inter Bold" pitchFamily="34" charset="-120"/>
-              </a:rPr>
-              <a:t>λ</a:t>
-            </a:r>
-            <a:r>
-              <a:rPr lang="en-US" sz="1050" dirty="0">
-                <a:solidFill>
-                  <a:srgbClr val="272525"/>
-                </a:solidFill>
-                <a:latin typeface="Inter" pitchFamily="34" charset="0"/>
-                <a:ea typeface="Inter" pitchFamily="34" charset="-122"/>
-                <a:cs typeface="Inter" pitchFamily="34" charset="-120"/>
-              </a:rPr>
-              <a:t> = risk-aversion parameter (controls return/risk tradeoff)</a:t>
-            </a:r>
-            <a:endParaRPr lang="en-US" sz="1050" dirty="0"/>
-          </a:p>
-        </p:txBody>
-      </p:sp>
-      <p:sp>
-        <p:nvSpPr>
-          <p:cNvPr id="9" name="Text 7"/>
-          <p:cNvSpPr/>
-          <p:nvPr/>
-        </p:nvSpPr>
-        <p:spPr>
-          <a:xfrm>
-            <a:off x="661475" y="3824387"/>
-            <a:ext cx="11478330" cy="200223"/>
-          </a:xfrm>
-          <a:prstGeom prst="rect">
-            <a:avLst/>
-          </a:prstGeom>
-          <a:noFill/>
-          <a:ln/>
-        </p:spPr>
-        <p:txBody>
-          <a:bodyPr wrap="none" lIns="0" tIns="0" rIns="0" bIns="0" rtlCol="0" anchor="t"/>
-          <a:lstStyle/>
-          <a:p>
-            <a:pPr marL="0" indent="0" algn="l">
-              <a:lnSpc>
-                <a:spcPct val="122000"/>
-              </a:lnSpc>
-              <a:buNone/>
-            </a:pPr>
-            <a:r>
-              <a:rPr lang="en-US" sz="1050" dirty="0">
-                <a:solidFill>
-                  <a:srgbClr val="272525"/>
-                </a:solidFill>
-                <a:latin typeface="Inter" pitchFamily="34" charset="0"/>
-                <a:ea typeface="Inter" pitchFamily="34" charset="-122"/>
-                <a:cs typeface="Inter" pitchFamily="34" charset="-120"/>
-              </a:rPr>
-              <a:t>This formulation is </a:t>
-            </a:r>
-            <a:r>
-              <a:rPr lang="en-US" sz="1050" b="1" dirty="0">
-                <a:solidFill>
-                  <a:srgbClr val="272525"/>
-                </a:solidFill>
-                <a:latin typeface="Inter Bold" pitchFamily="34" charset="0"/>
-                <a:ea typeface="Inter Bold" pitchFamily="34" charset="-122"/>
-                <a:cs typeface="Inter Bold" pitchFamily="34" charset="-120"/>
-              </a:rPr>
-              <a:t>convex</a:t>
-            </a:r>
-            <a:r>
-              <a:rPr lang="en-US" sz="1050" dirty="0">
-                <a:solidFill>
-                  <a:srgbClr val="272525"/>
-                </a:solidFill>
-                <a:latin typeface="Inter" pitchFamily="34" charset="0"/>
-                <a:ea typeface="Inter" pitchFamily="34" charset="-122"/>
-                <a:cs typeface="Inter" pitchFamily="34" charset="-120"/>
-              </a:rPr>
-              <a:t>—global optimum is guaranteed and solvable in polynomial time via standard QP solvers.</a:t>
-            </a:r>
-            <a:endParaRPr lang="en-US" sz="1050" dirty="0"/>
-          </a:p>
-        </p:txBody>
-      </p:sp>
-      <p:sp>
-        <p:nvSpPr>
-          <p:cNvPr id="10" name="Text 8"/>
-          <p:cNvSpPr/>
-          <p:nvPr/>
-        </p:nvSpPr>
-        <p:spPr>
-          <a:xfrm>
-            <a:off x="661475" y="4194671"/>
-            <a:ext cx="10868745" cy="224730"/>
-          </a:xfrm>
-          <a:prstGeom prst="rect">
-            <a:avLst/>
-          </a:prstGeom>
-          <a:noFill/>
-          <a:ln/>
-        </p:spPr>
-        <p:txBody>
-          <a:bodyPr wrap="none" lIns="0" tIns="0" rIns="0" bIns="0" rtlCol="0" anchor="t"/>
-          <a:lstStyle/>
-          <a:p>
-            <a:pPr marL="0" indent="0" algn="l">
-              <a:lnSpc>
-                <a:spcPct val="104000"/>
-              </a:lnSpc>
-              <a:buNone/>
-            </a:pPr>
-            <a:r>
-              <a:rPr lang="en-US" sz="1400" b="1" dirty="0">
-                <a:solidFill>
-                  <a:srgbClr val="000000"/>
-                </a:solidFill>
-                <a:latin typeface="Petrona Bold" pitchFamily="34" charset="0"/>
-                <a:ea typeface="Petrona Bold" pitchFamily="34" charset="-122"/>
-                <a:cs typeface="Petrona Bold" pitchFamily="34" charset="-120"/>
-              </a:rPr>
-              <a:t>Hard Problem: Add Realistic Trading Constraints</a:t>
-            </a:r>
-            <a:endParaRPr lang="en-US" sz="1400" dirty="0"/>
-          </a:p>
-        </p:txBody>
-      </p:sp>
-      <p:pic>
-        <p:nvPicPr>
-          <p:cNvPr id="11" name="Image 0" descr="preencoded.png"/>
-          <p:cNvPicPr>
-            <a:picLocks noChangeAspect="1"/>
-          </p:cNvPicPr>
-          <p:nvPr/>
-        </p:nvPicPr>
-        <p:blipFill>
-          <a:blip>
-            <a:extLst>
-              <a:ext uri="{96DAC541-7B7A-43D3-8B79-37D633B846F1}">
-                <asvg:svgBlip xmlns:asvg="http://schemas.microsoft.com/office/drawing/2016/SVG/main" r:embed="rId3"/>
-              </a:ext>
-            </a:extLst>
-          </a:blip>
-          <a:stretch>
-            <a:fillRect/>
-          </a:stretch>
-        </p:blipFill>
-        <p:spPr>
-          <a:xfrm>
-            <a:off x="661475" y="4589463"/>
-            <a:ext cx="2632108" cy="1405533"/>
-          </a:xfrm>
-          <a:prstGeom prst="rect">
-            <a:avLst/>
-          </a:prstGeom>
-        </p:spPr>
-      </p:pic>
-      <p:sp>
-        <p:nvSpPr>
-          <p:cNvPr id="12" name="Text 9"/>
-          <p:cNvSpPr/>
-          <p:nvPr/>
-        </p:nvSpPr>
-        <p:spPr>
-          <a:xfrm>
-            <a:off x="893641" y="4745434"/>
-            <a:ext cx="2243974" cy="224730"/>
-          </a:xfrm>
-          <a:prstGeom prst="rect">
-            <a:avLst/>
-          </a:prstGeom>
-          <a:noFill/>
-          <a:ln/>
-        </p:spPr>
-        <p:txBody>
-          <a:bodyPr wrap="none" lIns="0" tIns="0" rIns="0" bIns="0" rtlCol="0" anchor="t"/>
-          <a:lstStyle/>
-          <a:p>
-            <a:pPr marL="0" indent="0" algn="l">
-              <a:lnSpc>
-                <a:spcPct val="104000"/>
-              </a:lnSpc>
-              <a:buNone/>
-            </a:pPr>
-            <a:r>
-              <a:rPr lang="en-US" sz="1400" b="1" dirty="0">
-                <a:solidFill>
-                  <a:srgbClr val="272525"/>
-                </a:solidFill>
-                <a:latin typeface="Petrona Bold" pitchFamily="34" charset="0"/>
-                <a:ea typeface="Petrona Bold" pitchFamily="34" charset="-122"/>
-                <a:cs typeface="Petrona Bold" pitchFamily="34" charset="-120"/>
-              </a:rPr>
-              <a:t>Transaction Costs</a:t>
-            </a:r>
-            <a:endParaRPr lang="en-US" sz="1400" dirty="0"/>
-          </a:p>
-        </p:txBody>
-      </p:sp>
-      <p:sp>
-        <p:nvSpPr>
-          <p:cNvPr id="13" name="Text 10"/>
-          <p:cNvSpPr/>
-          <p:nvPr/>
-        </p:nvSpPr>
-        <p:spPr>
-          <a:xfrm>
-            <a:off x="893641" y="5038130"/>
-            <a:ext cx="2243974" cy="800894"/>
-          </a:xfrm>
-          <a:prstGeom prst="rect">
-            <a:avLst/>
-          </a:prstGeom>
-          <a:noFill/>
-          <a:ln/>
-        </p:spPr>
-        <p:txBody>
-          <a:bodyPr wrap="square" lIns="0" tIns="0" rIns="0" bIns="0" rtlCol="0" anchor="t">
-            <a:normAutofit/>
-          </a:bodyPr>
-          <a:lstStyle/>
-          <a:p>
-            <a:pPr marL="0" indent="0" algn="l">
-              <a:lnSpc>
-                <a:spcPct val="122000"/>
-              </a:lnSpc>
-              <a:buNone/>
-            </a:pPr>
-            <a:r>
-              <a:rPr lang="en-US" sz="1050" dirty="0">
-                <a:solidFill>
-                  <a:srgbClr val="272525"/>
-                </a:solidFill>
-                <a:latin typeface="Inter" pitchFamily="34" charset="0"/>
-                <a:ea typeface="Inter" pitchFamily="34" charset="-122"/>
-                <a:cs typeface="Inter" pitchFamily="34" charset="-120"/>
-              </a:rPr>
-              <a:t>Bid-ask spreads and commissions penalize frequent rebalancing. Modeled as a linear or quadratic cost term on weight changes.</a:t>
-            </a:r>
-            <a:endParaRPr lang="en-US" sz="1050" dirty="0"/>
-          </a:p>
-        </p:txBody>
-      </p:sp>
-      <p:pic>
-        <p:nvPicPr>
-          <p:cNvPr id="14" name="Image 1" descr="preencoded.png"/>
-          <p:cNvPicPr>
-            <a:picLocks noChangeAspect="1"/>
-          </p:cNvPicPr>
-          <p:nvPr/>
-        </p:nvPicPr>
-        <p:blipFill>
-          <a:blip>
-            <a:extLst>
-              <a:ext uri="{96DAC541-7B7A-43D3-8B79-37D633B846F1}">
-                <asvg:svgBlip xmlns:asvg="http://schemas.microsoft.com/office/drawing/2016/SVG/main" r:embed="rId3"/>
-              </a:ext>
-            </a:extLst>
-          </a:blip>
-          <a:stretch>
-            <a:fillRect/>
-          </a:stretch>
-        </p:blipFill>
-        <p:spPr>
-          <a:xfrm>
-            <a:off x="3406987" y="4589463"/>
-            <a:ext cx="2632108" cy="1405533"/>
-          </a:xfrm>
-          <a:prstGeom prst="rect">
-            <a:avLst/>
-          </a:prstGeom>
-        </p:spPr>
-      </p:pic>
-      <p:sp>
-        <p:nvSpPr>
-          <p:cNvPr id="15" name="Text 11"/>
-          <p:cNvSpPr/>
-          <p:nvPr/>
-        </p:nvSpPr>
-        <p:spPr>
-          <a:xfrm>
-            <a:off x="3639153" y="4745434"/>
-            <a:ext cx="2243974" cy="224730"/>
-          </a:xfrm>
-          <a:prstGeom prst="rect">
-            <a:avLst/>
-          </a:prstGeom>
-          <a:noFill/>
-          <a:ln/>
-        </p:spPr>
-        <p:txBody>
-          <a:bodyPr wrap="none" lIns="0" tIns="0" rIns="0" bIns="0" rtlCol="0" anchor="t"/>
-          <a:lstStyle/>
-          <a:p>
-            <a:pPr marL="0" indent="0" algn="l">
-              <a:lnSpc>
-                <a:spcPct val="104000"/>
-              </a:lnSpc>
-              <a:buNone/>
-            </a:pPr>
-            <a:r>
-              <a:rPr lang="en-US" sz="1400" b="1" dirty="0">
-                <a:solidFill>
-                  <a:srgbClr val="272525"/>
-                </a:solidFill>
-                <a:latin typeface="Petrona Bold" pitchFamily="34" charset="0"/>
-                <a:ea typeface="Petrona Bold" pitchFamily="34" charset="-122"/>
-                <a:cs typeface="Petrona Bold" pitchFamily="34" charset="-120"/>
-              </a:rPr>
-              <a:t>Cardinality Constraints</a:t>
-            </a:r>
-            <a:endParaRPr lang="en-US" sz="1400" dirty="0"/>
-          </a:p>
-        </p:txBody>
-      </p:sp>
-      <p:sp>
-        <p:nvSpPr>
-          <p:cNvPr id="16" name="Text 12"/>
-          <p:cNvSpPr/>
-          <p:nvPr/>
-        </p:nvSpPr>
-        <p:spPr>
-          <a:xfrm>
-            <a:off x="3639153" y="5038130"/>
-            <a:ext cx="2243974" cy="800894"/>
-          </a:xfrm>
-          <a:prstGeom prst="rect">
-            <a:avLst/>
-          </a:prstGeom>
-          <a:noFill/>
-          <a:ln/>
-        </p:spPr>
-        <p:txBody>
-          <a:bodyPr wrap="square" lIns="0" tIns="0" rIns="0" bIns="0" rtlCol="0" anchor="t">
-            <a:normAutofit/>
-          </a:bodyPr>
-          <a:lstStyle/>
-          <a:p>
-            <a:pPr marL="0" indent="0" algn="l">
-              <a:lnSpc>
-                <a:spcPct val="122000"/>
-              </a:lnSpc>
-              <a:buNone/>
-            </a:pPr>
-            <a:r>
-              <a:rPr lang="en-US" sz="1050" dirty="0">
-                <a:solidFill>
-                  <a:srgbClr val="272525"/>
-                </a:solidFill>
-                <a:latin typeface="Inter" pitchFamily="34" charset="0"/>
-                <a:ea typeface="Inter" pitchFamily="34" charset="-122"/>
-                <a:cs typeface="Inter" pitchFamily="34" charset="-120"/>
-              </a:rPr>
-              <a:t>Limit the number of assets held simultaneously. Introduces binary variables—this is what makes the problem NP-hard in general.</a:t>
-            </a:r>
-            <a:endParaRPr lang="en-US" sz="1050" dirty="0"/>
-          </a:p>
-        </p:txBody>
-      </p:sp>
-      <p:pic>
-        <p:nvPicPr>
-          <p:cNvPr id="17" name="Image 2" descr="preencoded.png"/>
-          <p:cNvPicPr>
-            <a:picLocks noChangeAspect="1"/>
-          </p:cNvPicPr>
-          <p:nvPr/>
-        </p:nvPicPr>
-        <p:blipFill>
-          <a:blip>
-            <a:extLst>
-              <a:ext uri="{96DAC541-7B7A-43D3-8B79-37D633B846F1}">
-                <asvg:svgBlip xmlns:asvg="http://schemas.microsoft.com/office/drawing/2016/SVG/main" r:embed="rId3"/>
-              </a:ext>
-            </a:extLst>
-          </a:blip>
-          <a:stretch>
-            <a:fillRect/>
-          </a:stretch>
-        </p:blipFill>
-        <p:spPr>
-          <a:xfrm>
-            <a:off x="6152500" y="4589463"/>
-            <a:ext cx="2632108" cy="1405533"/>
-          </a:xfrm>
-          <a:prstGeom prst="rect">
-            <a:avLst/>
-          </a:prstGeom>
-        </p:spPr>
-      </p:pic>
-      <p:sp>
-        <p:nvSpPr>
-          <p:cNvPr id="18" name="Text 13"/>
-          <p:cNvSpPr/>
-          <p:nvPr/>
-        </p:nvSpPr>
-        <p:spPr>
-          <a:xfrm>
-            <a:off x="6384666" y="4745434"/>
-            <a:ext cx="2243974" cy="224730"/>
-          </a:xfrm>
-          <a:prstGeom prst="rect">
-            <a:avLst/>
-          </a:prstGeom>
-          <a:noFill/>
-          <a:ln/>
-        </p:spPr>
-        <p:txBody>
-          <a:bodyPr wrap="none" lIns="0" tIns="0" rIns="0" bIns="0" rtlCol="0" anchor="t"/>
-          <a:lstStyle/>
-          <a:p>
-            <a:pPr marL="0" indent="0" algn="l">
-              <a:lnSpc>
-                <a:spcPct val="104000"/>
-              </a:lnSpc>
-              <a:buNone/>
-            </a:pPr>
-            <a:r>
-              <a:rPr lang="en-US" sz="1400" b="1" dirty="0">
-                <a:solidFill>
-                  <a:srgbClr val="272525"/>
-                </a:solidFill>
-                <a:latin typeface="Petrona Bold" pitchFamily="34" charset="0"/>
-                <a:ea typeface="Petrona Bold" pitchFamily="34" charset="-122"/>
-                <a:cs typeface="Petrona Bold" pitchFamily="34" charset="-120"/>
-              </a:rPr>
-              <a:t>Position Limits</a:t>
-            </a:r>
-            <a:endParaRPr lang="en-US" sz="1400" dirty="0"/>
-          </a:p>
-        </p:txBody>
-      </p:sp>
-      <p:sp>
-        <p:nvSpPr>
-          <p:cNvPr id="19" name="Text 14"/>
-          <p:cNvSpPr/>
-          <p:nvPr/>
-        </p:nvSpPr>
-        <p:spPr>
-          <a:xfrm>
-            <a:off x="6384666" y="5038130"/>
-            <a:ext cx="2243974" cy="800894"/>
-          </a:xfrm>
-          <a:prstGeom prst="rect">
-            <a:avLst/>
-          </a:prstGeom>
-          <a:noFill/>
-          <a:ln/>
-        </p:spPr>
-        <p:txBody>
-          <a:bodyPr wrap="square" lIns="0" tIns="0" rIns="0" bIns="0" rtlCol="0" anchor="t">
-            <a:normAutofit/>
-          </a:bodyPr>
-          <a:lstStyle/>
-          <a:p>
-            <a:pPr marL="0" indent="0" algn="l">
-              <a:lnSpc>
-                <a:spcPct val="122000"/>
-              </a:lnSpc>
-              <a:buNone/>
-            </a:pPr>
-            <a:r>
-              <a:rPr lang="en-US" sz="1050" dirty="0">
-                <a:solidFill>
-                  <a:srgbClr val="272525"/>
-                </a:solidFill>
-                <a:latin typeface="Inter" pitchFamily="34" charset="0"/>
-                <a:ea typeface="Inter" pitchFamily="34" charset="-122"/>
-                <a:cs typeface="Inter" pitchFamily="34" charset="-120"/>
-              </a:rPr>
-              <a:t>Minimum and maximum weight per asset. Prevents over-concentration and enforces diversification mandates.</a:t>
-            </a:r>
-            <a:endParaRPr lang="en-US" sz="1050" dirty="0"/>
-          </a:p>
-        </p:txBody>
-      </p:sp>
-      <p:pic>
-        <p:nvPicPr>
-          <p:cNvPr id="20" name="Image 3" descr="preencoded.png"/>
-          <p:cNvPicPr>
-            <a:picLocks noChangeAspect="1"/>
-          </p:cNvPicPr>
-          <p:nvPr/>
-        </p:nvPicPr>
-        <p:blipFill>
-          <a:blip>
-            <a:extLst>
-              <a:ext uri="{96DAC541-7B7A-43D3-8B79-37D633B846F1}">
-                <asvg:svgBlip xmlns:asvg="http://schemas.microsoft.com/office/drawing/2016/SVG/main" r:embed="rId3"/>
-              </a:ext>
-            </a:extLst>
-          </a:blip>
-          <a:stretch>
-            <a:fillRect/>
-          </a:stretch>
-        </p:blipFill>
-        <p:spPr>
-          <a:xfrm>
-            <a:off x="8898013" y="4589463"/>
-            <a:ext cx="2632208" cy="1405533"/>
-          </a:xfrm>
-          <a:prstGeom prst="rect">
-            <a:avLst/>
-          </a:prstGeom>
-        </p:spPr>
-      </p:pic>
-      <p:sp>
-        <p:nvSpPr>
-          <p:cNvPr id="21" name="Text 15"/>
-          <p:cNvSpPr/>
-          <p:nvPr/>
-        </p:nvSpPr>
-        <p:spPr>
-          <a:xfrm>
-            <a:off x="9130179" y="4745434"/>
-            <a:ext cx="2244074" cy="224730"/>
-          </a:xfrm>
-          <a:prstGeom prst="rect">
-            <a:avLst/>
-          </a:prstGeom>
-          <a:noFill/>
-          <a:ln/>
-        </p:spPr>
-        <p:txBody>
-          <a:bodyPr wrap="none" lIns="0" tIns="0" rIns="0" bIns="0" rtlCol="0" anchor="t"/>
-          <a:lstStyle/>
-          <a:p>
-            <a:pPr marL="0" indent="0" algn="l">
-              <a:lnSpc>
-                <a:spcPct val="104000"/>
-              </a:lnSpc>
-              <a:buNone/>
-            </a:pPr>
-            <a:r>
-              <a:rPr lang="en-US" sz="1400" b="1" dirty="0">
-                <a:solidFill>
-                  <a:srgbClr val="272525"/>
-                </a:solidFill>
-                <a:latin typeface="Petrona Bold" pitchFamily="34" charset="0"/>
-                <a:ea typeface="Petrona Bold" pitchFamily="34" charset="-122"/>
-                <a:cs typeface="Petrona Bold" pitchFamily="34" charset="-120"/>
-              </a:rPr>
-              <a:t>Turnover Constraints</a:t>
-            </a:r>
-            <a:endParaRPr lang="en-US" sz="1400" dirty="0"/>
-          </a:p>
-        </p:txBody>
-      </p:sp>
-      <p:sp>
-        <p:nvSpPr>
-          <p:cNvPr id="22" name="Text 16"/>
-          <p:cNvSpPr/>
-          <p:nvPr/>
-        </p:nvSpPr>
-        <p:spPr>
-          <a:xfrm>
-            <a:off x="9130179" y="5038130"/>
-            <a:ext cx="2244074" cy="600670"/>
-          </a:xfrm>
-          <a:prstGeom prst="rect">
-            <a:avLst/>
-          </a:prstGeom>
-          <a:noFill/>
-          <a:ln/>
-        </p:spPr>
-        <p:txBody>
-          <a:bodyPr wrap="square" lIns="0" tIns="0" rIns="0" bIns="0" rtlCol="0" anchor="t">
-            <a:normAutofit/>
-          </a:bodyPr>
-          <a:lstStyle/>
-          <a:p>
-            <a:pPr marL="0" indent="0" algn="l">
-              <a:lnSpc>
-                <a:spcPct val="122000"/>
-              </a:lnSpc>
-              <a:buNone/>
-            </a:pPr>
-            <a:r>
-              <a:rPr lang="en-US" sz="1050" dirty="0">
-                <a:solidFill>
-                  <a:srgbClr val="272525"/>
-                </a:solidFill>
-                <a:latin typeface="Inter" pitchFamily="34" charset="0"/>
-                <a:ea typeface="Inter" pitchFamily="34" charset="-122"/>
-                <a:cs typeface="Inter" pitchFamily="34" charset="-120"/>
-              </a:rPr>
-              <a:t>Bound the total portfolio rebalancing per period, reflecting capacity and liquidity limitations.</a:t>
-            </a:r>
-            <a:endParaRPr lang="en-US" sz="1050" dirty="0"/>
-          </a:p>
-        </p:txBody>
-      </p:sp>
-      <p:sp>
-        <p:nvSpPr>
-          <p:cNvPr id="23" name="Text 17"/>
-          <p:cNvSpPr/>
-          <p:nvPr/>
-        </p:nvSpPr>
-        <p:spPr>
-          <a:xfrm>
-            <a:off x="661475" y="6122591"/>
-            <a:ext cx="11478330" cy="160139"/>
-          </a:xfrm>
-          <a:prstGeom prst="rect">
-            <a:avLst/>
-          </a:prstGeom>
-          <a:noFill/>
-          <a:ln/>
-        </p:spPr>
-        <p:txBody>
-          <a:bodyPr wrap="none" lIns="0" tIns="0" rIns="0" bIns="0" rtlCol="0" anchor="t"/>
-          <a:lstStyle/>
-          <a:p>
-            <a:pPr marL="0" indent="0" algn="l">
-              <a:lnSpc>
-                <a:spcPct val="122000"/>
-              </a:lnSpc>
-              <a:buNone/>
-            </a:pPr>
-            <a:r>
-              <a:rPr lang="en-US" sz="850" b="1" dirty="0">
-                <a:solidFill>
-                  <a:srgbClr val="272525"/>
-                </a:solidFill>
-                <a:latin typeface="Inter Bold" pitchFamily="34" charset="0"/>
-                <a:ea typeface="Inter Bold" pitchFamily="34" charset="-122"/>
-                <a:cs typeface="Inter Bold" pitchFamily="34" charset="-120"/>
-              </a:rPr>
-              <a:t>Core research question:</a:t>
-            </a:r>
-            <a:r>
-              <a:rPr lang="en-US" sz="850" dirty="0">
-                <a:solidFill>
-                  <a:srgbClr val="272525"/>
-                </a:solidFill>
-                <a:latin typeface="Inter" pitchFamily="34" charset="0"/>
-                <a:ea typeface="Inter" pitchFamily="34" charset="-122"/>
-                <a:cs typeface="Inter" pitchFamily="34" charset="-120"/>
-              </a:rPr>
-              <a:t> How much do constraints change the optimal portfolio and its performance? Quantifying this "price of realism" is the central contribution.</a:t>
-            </a:r>
-            <a:endParaRPr lang="en-US" sz="850" dirty="0"/>
-          </a:p>
-        </p:txBody>
-      </p:sp>
-      <p:sp>
-        <p:nvSpPr>
-          <p:cNvPr id="25" name="Rectangle 24">
-            <a:extLst>
-              <a:ext uri="{FF2B5EF4-FFF2-40B4-BE49-F238E27FC236}">
-                <a16:creationId xmlns:a16="http://schemas.microsoft.com/office/drawing/2014/main" id="{370A68CE-7831-3303-7D92-A09F9079490E}"/>
-              </a:ext>
-            </a:extLst>
-          </p:cNvPr>
-          <p:cNvSpPr/>
-          <p:nvPr/>
-        </p:nvSpPr>
-        <p:spPr>
-          <a:xfrm>
-            <a:off x="11050438" y="6538823"/>
-            <a:ext cx="1089367" cy="264616"/>
-          </a:xfrm>
-          <a:prstGeom prst="rect">
-            <a:avLst/>
-          </a:prstGeom>
-          <a:solidFill>
-            <a:srgbClr val="FBFCFD"/>
-          </a:solidFill>
-          <a:ln>
-            <a:noFill/>
-          </a:ln>
-        </p:spPr>
-        <p:style>
-          <a:lnRef idx="2">
-            <a:schemeClr val="accent1">
-              <a:shade val="15000"/>
-            </a:schemeClr>
-          </a:lnRef>
-          <a:fillRef idx="1">
-            <a:schemeClr val="accent1"/>
-          </a:fillRef>
-          <a:effectRef idx="0">
-            <a:schemeClr val="accent1"/>
-          </a:effectRef>
-          <a:fontRef idx="minor">
-            <a:schemeClr val="lt1"/>
-          </a:fontRef>
-        </p:style>
-        <p:txBody>
-          <a:bodyPr rtlCol="0" anchor="ctr"/>
-          <a:lstStyle/>
-          <a:p>
-            <a:pPr algn="ctr"/>
-            <a:endParaRPr lang="en-IN"/>
-          </a:p>
-        </p:txBody>
-      </p:sp>
-    </p:spTree>
-  </p:cSld>
-  <p:clrMapOvr>
-    <a:masterClrMapping/>
-  </p:clrMapOvr>
-</p:sld>
-</file>
-
-<file path=ppt/slides/slide7.xml><?xml version="1.0" encoding="utf-8"?>
-<p:sld xmlns:a="http://schemas.openxmlformats.org/drawingml/2006/main" xmlns:r="http://schemas.openxmlformats.org/officeDocument/2006/relationships" xmlns:p="http://schemas.openxmlformats.org/presentationml/2006/main">
   <p:cSld name="Slide 6">
     <p:spTree>
       <p:nvGrpSpPr>
@@ -7604,8 +6424,8 @@
           </a:p>
         </p:txBody>
       </p:sp>
-      <mc:AlternateContent xmlns:mc="http://schemas.openxmlformats.org/markup-compatibility/2006">
-        <mc:Choice xmlns:a14="http://schemas.microsoft.com/office/drawing/2010/main" Requires="a14">
+      <mc:AlternateContent xmlns:mc="http://schemas.openxmlformats.org/markup-compatibility/2006" xmlns:a14="http://schemas.microsoft.com/office/drawing/2010/main">
+        <mc:Choice Requires="a14">
           <p:sp>
             <p:nvSpPr>
               <p:cNvPr id="25" name="Text 19"/>
@@ -7661,7 +6481,9 @@
                 <a14:m>
                   <m:oMath xmlns:m="http://schemas.openxmlformats.org/officeDocument/2006/math">
                     <m:r>
-                      <a:rPr lang="en-IN" i="1"/>
+                      <a:rPr lang="en-IN" i="1">
+                        <a:latin typeface="Cambria Math" panose="02040503050406030204" pitchFamily="18" charset="0"/>
+                      </a:rPr>
                       <m:t>𝜆</m:t>
                     </m:r>
                   </m:oMath>
@@ -7681,7 +6503,7 @@
             </p:txBody>
           </p:sp>
         </mc:Choice>
-        <mc:Fallback>
+        <mc:Fallback xmlns="">
           <p:sp>
             <p:nvSpPr>
               <p:cNvPr id="25" name="Text 19"/>
@@ -7830,7 +6652,7 @@
 </p:sld>
 </file>
 
-<file path=ppt/slides/slide8.xml><?xml version="1.0" encoding="utf-8"?>
+<file path=ppt/slides/slide7.xml><?xml version="1.0" encoding="utf-8"?>
 <p:sld xmlns:a="http://schemas.openxmlformats.org/drawingml/2006/main" xmlns:r="http://schemas.openxmlformats.org/officeDocument/2006/relationships" xmlns:p="http://schemas.openxmlformats.org/presentationml/2006/main">
   <p:cSld>
     <p:spTree>
